--- a/present/ripwire-showcase.pptx
+++ b/present/ripwire-showcase.pptx
@@ -12109,7 +12109,7 @@
               <a:buNone/>
             </a:pPr>
             <a:r>
-              <a:rPr lang="en-US" sz="3200" b="1" dirty="0">
+              <a:rPr lang="en-US" sz="2800" b="1" dirty="0">
                 <a:solidFill>
                   <a:srgbClr val="E6EDF3"/>
                 </a:solidFill>
@@ -12119,7 +12119,7 @@
               </a:rPr>
               <a:t>Every head-to-head round, and the ones that went against us</a:t>
             </a:r>
-            <a:endParaRPr lang="en-US" sz="3200" dirty="0"/>
+            <a:endParaRPr lang="en-US" sz="2800" dirty="0"/>
           </a:p>
         </p:txBody>
       </p:sp>
@@ -29726,11 +29726,11 @@
         <p:spPr>
           <a:xfrm>
             <a:off x="566928" y="1874520"/>
-            <a:ext cx="5577840" cy="603504"/>
+            <a:ext cx="5577840" cy="566928"/>
           </a:xfrm>
           <a:prstGeom prst="roundRect">
             <a:avLst>
-              <a:gd name="adj" fmla="val 13636"/>
+              <a:gd name="adj" fmla="val 14516"/>
             </a:avLst>
           </a:prstGeom>
           <a:solidFill>
@@ -29753,7 +29753,7 @@
         <p:spPr>
           <a:xfrm>
             <a:off x="713232" y="1911096"/>
-            <a:ext cx="685800" cy="530352"/>
+            <a:ext cx="685800" cy="493776"/>
           </a:xfrm>
           <a:prstGeom prst="rect">
             <a:avLst/>
@@ -29792,7 +29792,7 @@
         <p:spPr>
           <a:xfrm>
             <a:off x="1481328" y="1911096"/>
-            <a:ext cx="4572000" cy="530352"/>
+            <a:ext cx="4572000" cy="493776"/>
           </a:xfrm>
           <a:prstGeom prst="rect">
             <a:avLst/>
@@ -29845,12 +29845,12 @@
         </p:nvSpPr>
         <p:spPr>
           <a:xfrm>
-            <a:off x="566928" y="2551176"/>
-            <a:ext cx="5577840" cy="603504"/>
+            <a:off x="566928" y="2514600"/>
+            <a:ext cx="5577840" cy="566928"/>
           </a:xfrm>
           <a:prstGeom prst="roundRect">
             <a:avLst>
-              <a:gd name="adj" fmla="val 13636"/>
+              <a:gd name="adj" fmla="val 14516"/>
             </a:avLst>
           </a:prstGeom>
           <a:solidFill>
@@ -29872,8 +29872,8 @@
         </p:nvSpPr>
         <p:spPr>
           <a:xfrm>
-            <a:off x="713232" y="2587752"/>
-            <a:ext cx="685800" cy="530352"/>
+            <a:off x="713232" y="2551176"/>
+            <a:ext cx="685800" cy="493776"/>
           </a:xfrm>
           <a:prstGeom prst="rect">
             <a:avLst/>
@@ -29911,8 +29911,8 @@
         </p:nvSpPr>
         <p:spPr>
           <a:xfrm>
-            <a:off x="1481328" y="2587752"/>
-            <a:ext cx="4572000" cy="530352"/>
+            <a:off x="1481328" y="2551176"/>
+            <a:ext cx="4572000" cy="493776"/>
           </a:xfrm>
           <a:prstGeom prst="rect">
             <a:avLst/>
@@ -29965,12 +29965,12 @@
         </p:nvSpPr>
         <p:spPr>
           <a:xfrm>
-            <a:off x="566928" y="3227832"/>
-            <a:ext cx="5577840" cy="603504"/>
+            <a:off x="566928" y="3154680"/>
+            <a:ext cx="5577840" cy="566928"/>
           </a:xfrm>
           <a:prstGeom prst="roundRect">
             <a:avLst>
-              <a:gd name="adj" fmla="val 13636"/>
+              <a:gd name="adj" fmla="val 14516"/>
             </a:avLst>
           </a:prstGeom>
           <a:solidFill>
@@ -29992,8 +29992,8 @@
         </p:nvSpPr>
         <p:spPr>
           <a:xfrm>
-            <a:off x="713232" y="3264408"/>
-            <a:ext cx="685800" cy="530352"/>
+            <a:off x="713232" y="3191256"/>
+            <a:ext cx="685800" cy="493776"/>
           </a:xfrm>
           <a:prstGeom prst="rect">
             <a:avLst/>
@@ -30031,8 +30031,8 @@
         </p:nvSpPr>
         <p:spPr>
           <a:xfrm>
-            <a:off x="1481328" y="3264408"/>
-            <a:ext cx="4572000" cy="530352"/>
+            <a:off x="1481328" y="3191256"/>
+            <a:ext cx="4572000" cy="493776"/>
           </a:xfrm>
           <a:prstGeom prst="rect">
             <a:avLst/>
@@ -30085,12 +30085,12 @@
         </p:nvSpPr>
         <p:spPr>
           <a:xfrm>
-            <a:off x="566928" y="3904488"/>
-            <a:ext cx="5577840" cy="603504"/>
+            <a:off x="566928" y="3794760"/>
+            <a:ext cx="5577840" cy="566928"/>
           </a:xfrm>
           <a:prstGeom prst="roundRect">
             <a:avLst>
-              <a:gd name="adj" fmla="val 13636"/>
+              <a:gd name="adj" fmla="val 14516"/>
             </a:avLst>
           </a:prstGeom>
           <a:solidFill>
@@ -30112,8 +30112,8 @@
         </p:nvSpPr>
         <p:spPr>
           <a:xfrm>
-            <a:off x="713232" y="3941064"/>
-            <a:ext cx="685800" cy="530352"/>
+            <a:off x="713232" y="3831336"/>
+            <a:ext cx="685800" cy="493776"/>
           </a:xfrm>
           <a:prstGeom prst="rect">
             <a:avLst/>
@@ -30151,8 +30151,8 @@
         </p:nvSpPr>
         <p:spPr>
           <a:xfrm>
-            <a:off x="1481328" y="3941064"/>
-            <a:ext cx="4572000" cy="530352"/>
+            <a:off x="1481328" y="3831336"/>
+            <a:ext cx="4572000" cy="493776"/>
           </a:xfrm>
           <a:prstGeom prst="rect">
             <a:avLst/>
@@ -30205,12 +30205,12 @@
         </p:nvSpPr>
         <p:spPr>
           <a:xfrm>
-            <a:off x="566928" y="4581144"/>
-            <a:ext cx="5577840" cy="603504"/>
+            <a:off x="566928" y="4434840"/>
+            <a:ext cx="5577840" cy="566928"/>
           </a:xfrm>
           <a:prstGeom prst="roundRect">
             <a:avLst>
-              <a:gd name="adj" fmla="val 13636"/>
+              <a:gd name="adj" fmla="val 14516"/>
             </a:avLst>
           </a:prstGeom>
           <a:solidFill>
@@ -30232,8 +30232,8 @@
         </p:nvSpPr>
         <p:spPr>
           <a:xfrm>
-            <a:off x="713232" y="4617720"/>
-            <a:ext cx="685800" cy="530352"/>
+            <a:off x="713232" y="4471416"/>
+            <a:ext cx="685800" cy="493776"/>
           </a:xfrm>
           <a:prstGeom prst="rect">
             <a:avLst/>
@@ -30271,8 +30271,8 @@
         </p:nvSpPr>
         <p:spPr>
           <a:xfrm>
-            <a:off x="1481328" y="4617720"/>
-            <a:ext cx="4572000" cy="530352"/>
+            <a:off x="1481328" y="4471416"/>
+            <a:ext cx="4572000" cy="493776"/>
           </a:xfrm>
           <a:prstGeom prst="rect">
             <a:avLst/>
@@ -30325,12 +30325,12 @@
         </p:nvSpPr>
         <p:spPr>
           <a:xfrm>
-            <a:off x="566928" y="5257800"/>
-            <a:ext cx="5577840" cy="603504"/>
+            <a:off x="566928" y="5074920"/>
+            <a:ext cx="5577840" cy="566928"/>
           </a:xfrm>
           <a:prstGeom prst="roundRect">
             <a:avLst>
-              <a:gd name="adj" fmla="val 13636"/>
+              <a:gd name="adj" fmla="val 14516"/>
             </a:avLst>
           </a:prstGeom>
           <a:solidFill>
@@ -30352,8 +30352,8 @@
         </p:nvSpPr>
         <p:spPr>
           <a:xfrm>
-            <a:off x="713232" y="5294376"/>
-            <a:ext cx="685800" cy="530352"/>
+            <a:off x="713232" y="5111496"/>
+            <a:ext cx="685800" cy="493776"/>
           </a:xfrm>
           <a:prstGeom prst="rect">
             <a:avLst/>
@@ -30391,8 +30391,8 @@
         </p:nvSpPr>
         <p:spPr>
           <a:xfrm>
-            <a:off x="1481328" y="5294376"/>
-            <a:ext cx="4572000" cy="530352"/>
+            <a:off x="1481328" y="5111496"/>
+            <a:ext cx="4572000" cy="493776"/>
           </a:xfrm>
           <a:prstGeom prst="rect">
             <a:avLst/>
@@ -30445,12 +30445,12 @@
         </p:nvSpPr>
         <p:spPr>
           <a:xfrm>
-            <a:off x="566928" y="5934456"/>
-            <a:ext cx="5577840" cy="603504"/>
+            <a:off x="566928" y="5715000"/>
+            <a:ext cx="5577840" cy="566928"/>
           </a:xfrm>
           <a:prstGeom prst="roundRect">
             <a:avLst>
-              <a:gd name="adj" fmla="val 13636"/>
+              <a:gd name="adj" fmla="val 14516"/>
             </a:avLst>
           </a:prstGeom>
           <a:solidFill>
@@ -30472,8 +30472,8 @@
         </p:nvSpPr>
         <p:spPr>
           <a:xfrm>
-            <a:off x="713232" y="5971032"/>
-            <a:ext cx="685800" cy="530352"/>
+            <a:off x="713232" y="5751576"/>
+            <a:ext cx="685800" cy="493776"/>
           </a:xfrm>
           <a:prstGeom prst="rect">
             <a:avLst/>
@@ -30511,8 +30511,8 @@
         </p:nvSpPr>
         <p:spPr>
           <a:xfrm>
-            <a:off x="1481328" y="5971032"/>
-            <a:ext cx="4572000" cy="530352"/>
+            <a:off x="1481328" y="5751576"/>
+            <a:ext cx="4572000" cy="493776"/>
           </a:xfrm>
           <a:prstGeom prst="rect">
             <a:avLst/>
@@ -30566,11 +30566,11 @@
         <p:spPr>
           <a:xfrm>
             <a:off x="6400800" y="1874520"/>
-            <a:ext cx="5120640" cy="868680"/>
+            <a:ext cx="5120640" cy="822960"/>
           </a:xfrm>
           <a:prstGeom prst="roundRect">
             <a:avLst>
-              <a:gd name="adj" fmla="val 9474"/>
+              <a:gd name="adj" fmla="val 10000"/>
             </a:avLst>
           </a:prstGeom>
           <a:solidFill>
@@ -30632,7 +30632,7 @@
         <p:spPr>
           <a:xfrm>
             <a:off x="6583680" y="2203704"/>
-            <a:ext cx="4754880" cy="502920"/>
+            <a:ext cx="4754880" cy="457200"/>
           </a:xfrm>
           <a:prstGeom prst="rect">
             <a:avLst/>
@@ -30670,12 +30670,12 @@
         </p:nvSpPr>
         <p:spPr>
           <a:xfrm>
-            <a:off x="6400800" y="2816352"/>
-            <a:ext cx="5120640" cy="868680"/>
+            <a:off x="6400800" y="2761488"/>
+            <a:ext cx="5120640" cy="822960"/>
           </a:xfrm>
           <a:prstGeom prst="roundRect">
             <a:avLst>
-              <a:gd name="adj" fmla="val 9474"/>
+              <a:gd name="adj" fmla="val 10000"/>
             </a:avLst>
           </a:prstGeom>
           <a:solidFill>
@@ -30697,7 +30697,7 @@
         </p:nvSpPr>
         <p:spPr>
           <a:xfrm>
-            <a:off x="6583680" y="2871216"/>
+            <a:off x="6583680" y="2816352"/>
             <a:ext cx="4754880" cy="274320"/>
           </a:xfrm>
           <a:prstGeom prst="rect">
@@ -30736,8 +30736,8 @@
         </p:nvSpPr>
         <p:spPr>
           <a:xfrm>
-            <a:off x="6583680" y="3145536"/>
-            <a:ext cx="4754880" cy="502920"/>
+            <a:off x="6583680" y="3090672"/>
+            <a:ext cx="4754880" cy="457200"/>
           </a:xfrm>
           <a:prstGeom prst="rect">
             <a:avLst/>
@@ -30775,12 +30775,12 @@
         </p:nvSpPr>
         <p:spPr>
           <a:xfrm>
-            <a:off x="6400800" y="3758184"/>
-            <a:ext cx="5120640" cy="868680"/>
+            <a:off x="6400800" y="3648456"/>
+            <a:ext cx="5120640" cy="822960"/>
           </a:xfrm>
           <a:prstGeom prst="roundRect">
             <a:avLst>
-              <a:gd name="adj" fmla="val 9474"/>
+              <a:gd name="adj" fmla="val 10000"/>
             </a:avLst>
           </a:prstGeom>
           <a:solidFill>
@@ -30802,7 +30802,7 @@
         </p:nvSpPr>
         <p:spPr>
           <a:xfrm>
-            <a:off x="6583680" y="3813048"/>
+            <a:off x="6583680" y="3703320"/>
             <a:ext cx="4754880" cy="274320"/>
           </a:xfrm>
           <a:prstGeom prst="rect">
@@ -30841,8 +30841,8 @@
         </p:nvSpPr>
         <p:spPr>
           <a:xfrm>
-            <a:off x="6583680" y="4087368"/>
-            <a:ext cx="4754880" cy="502920"/>
+            <a:off x="6583680" y="3977640"/>
+            <a:ext cx="4754880" cy="457200"/>
           </a:xfrm>
           <a:prstGeom prst="rect">
             <a:avLst/>
@@ -30880,12 +30880,12 @@
         </p:nvSpPr>
         <p:spPr>
           <a:xfrm>
-            <a:off x="6400800" y="4700016"/>
-            <a:ext cx="5120640" cy="868680"/>
+            <a:off x="6400800" y="4535424"/>
+            <a:ext cx="5120640" cy="822960"/>
           </a:xfrm>
           <a:prstGeom prst="roundRect">
             <a:avLst>
-              <a:gd name="adj" fmla="val 9474"/>
+              <a:gd name="adj" fmla="val 10000"/>
             </a:avLst>
           </a:prstGeom>
           <a:solidFill>
@@ -30907,7 +30907,7 @@
         </p:nvSpPr>
         <p:spPr>
           <a:xfrm>
-            <a:off x="6583680" y="4754880"/>
+            <a:off x="6583680" y="4590288"/>
             <a:ext cx="4754880" cy="274320"/>
           </a:xfrm>
           <a:prstGeom prst="rect">
@@ -30946,8 +30946,8 @@
         </p:nvSpPr>
         <p:spPr>
           <a:xfrm>
-            <a:off x="6583680" y="5029200"/>
-            <a:ext cx="4754880" cy="502920"/>
+            <a:off x="6583680" y="4864608"/>
+            <a:ext cx="4754880" cy="457200"/>
           </a:xfrm>
           <a:prstGeom prst="rect">
             <a:avLst/>
@@ -30985,12 +30985,12 @@
         </p:nvSpPr>
         <p:spPr>
           <a:xfrm>
-            <a:off x="6400800" y="5641848"/>
-            <a:ext cx="5120640" cy="868680"/>
+            <a:off x="6400800" y="5422392"/>
+            <a:ext cx="5120640" cy="822960"/>
           </a:xfrm>
           <a:prstGeom prst="roundRect">
             <a:avLst>
-              <a:gd name="adj" fmla="val 9474"/>
+              <a:gd name="adj" fmla="val 10000"/>
             </a:avLst>
           </a:prstGeom>
           <a:solidFill>
@@ -31012,7 +31012,7 @@
         </p:nvSpPr>
         <p:spPr>
           <a:xfrm>
-            <a:off x="6583680" y="5696712"/>
+            <a:off x="6583680" y="5477256"/>
             <a:ext cx="4754880" cy="274320"/>
           </a:xfrm>
           <a:prstGeom prst="rect">
@@ -31051,8 +31051,8 @@
         </p:nvSpPr>
         <p:spPr>
           <a:xfrm>
-            <a:off x="6583680" y="5971032"/>
-            <a:ext cx="4754880" cy="502920"/>
+            <a:off x="6583680" y="5751576"/>
+            <a:ext cx="4754880" cy="457200"/>
           </a:xfrm>
           <a:prstGeom prst="rect">
             <a:avLst/>
@@ -31115,7 +31115,7 @@
                 <a:ea typeface="Courier New" pitchFamily="34" charset="-122"/>
                 <a:cs typeface="Courier New" pitchFamily="34" charset="-120"/>
               </a:rPr>
-              <a:t>counts gated in-repo (readmedriftcheck arm E derives them from LINEAGE.md's own tables) — the lineage is the design rationale, not decoration</a:t>
+              <a:t>counts gated in-repo: readmedriftcheck arm E derives them from LINEAGE.md's own tables — the lineage is the design rationale</a:t>
             </a:r>
             <a:endParaRPr lang="en-US" sz="1050" dirty="0"/>
           </a:p>

--- a/present/ripwire-showcase.pptx
+++ b/present/ripwire-showcase.pptx
@@ -3082,9 +3082,29 @@
           <a:p>
             <a:r>
               <a:rPr lang="en-US" dirty="0"/>
-              <a:t>PLACEHOLDER — no example is shown on purpose.
-The examples come from docs/QUALITY_DELTA_CATALOG.md, which a separate lane is writing with real, reproduced findings. It is not in the tree as of main 766913d0.
-To fill: add 3 to 6 { kind, finding, before, after, why } entries to QD_EXAMPLES at the top of present/deck5_ripwire_build.js, copied from the catalog, then rebuild. The notes list each entry against the catalog.</a:t>
+              <a:t>SOURCES: docs/QUALITY_DELTA_CATALOG.md — one entry per card, left to right, then top to bottom.
+The snippets are the catalog's excerpts, trimmed to fit a card: … marks elided code, long lines wrap, and a comment line stands for code the catalog says was elided or deleted.
+1. new-clone-of-reused-helper: registeredMacroNames | vendoredPathPrefixes
+   Catalog §1, "new-clone-of-reused-helper: a helper written out longhand beside the one it copies" (catalog commit 553dbadb). Commits: base 05f4b892 → before c7e93089 → after cca0bf8d, in the per-kind dials round (PR #127).
+   Row, verbatim (05f4b892..c7e93089): &lt;r kind="new-clone-of-reused-helper" sym="src/quality.h::quality::registeredMacroNames | src/quality.h::quality::vendoredPathPrefixes" was="0" now="3" p="src/quality.h:433" gating="1" next="--expand=src/quality.h:vendoredPathPrefixes"/&gt;. The same report gates two duplication rows (tokens="114") and a verbosity row on readRegisterMacrosConfig (was="58" now="69" bar="60").
+   Why it is more than a duplication row: now="3" is the fan-in of the helper the copy duplicated, so three call sites already relied on that shape. Both readers now call mergeBuiltinsWithConfig, and the third member (editplan::callersUnionSize) lost its duplication row with it. The commit ran this on the round that built the dials.
+   Reproduce: base=05f4b892 before=c7e93089 after=cca0bf8d; git worktree add --detach ../qd-before $before; ./build/ripwire ../qd-before --quality-delta=$base..$before --scope=src/quality.h --legend=compact → the four rows, gating="4", exit 2; with $base..$after → gating="0", exit 0. Re-run 2026-09-11 with a built_from=766913d02 build: both match the catalog.
+2. nesting: runChangeViews was="6" now="8" · complexity was="141" now="178"
+   Catalog §6, "nesting: an inline scan inside a per-root loop" (catalog commit 553dbadb). Commits: base e3b52d39 → before 4c526577 → after a8e994d1.
+   Rows, verbatim (e3b52d39..4c526577): &lt;r kind="nesting" sym="runChangeViews" was="6" now="8" bar="4" p="src/verbs_change.h:245" gating="1" next="--expand=src/verbs_change.h:runChangeViews"/&gt; and &lt;r kind="complexity" sym="runChangeViews" was="141" now="178" bar="15" p="src/verbs_change.h:245" gating="1" next="--expand=src/verbs_change.h:runChangeViews"/&gt;. A third row gates resolveSinceScope's second git-pipe reader (was="6" now="23" bar="15").
+   The inner for/if/break asked whether this root has any change, so it is std::any_of, and the scan is a named function that takes two more levels out of the dispatcher. resolveSinceScope now reads both git answers through popenTrimmed, the pipe reader the tree already had; the commit records a first attempt, a private copy of that reader, which the report flagged as a new-clone-of-reused-helper. The dispatcher keeps a minor row (was="141" now="146"): chronic debt this change neither created nor gated on.
+   Reproduce: base=e3b52d39 before=4c526577 after=a8e994d1; git worktree add --detach ../qd-before $before; ./build/ripwire ../qd-before --quality-delta=$base..$before --scope=src/verbs_change.h,src/gitmine.h --legend=compact → the three rows, gating="3", exit 2; with $base..$after → minor rows only, gating="0", exit 0. Re-run 2026-09-11 with a built_from=766913d02 build: both match the catalog.
+3. dead-code: mentionFilesCut · namesUnkeptPackageIndex
+   Catalog §7, "dead-code: helpers a rewrite left with no caller" (catalog commit 553dbadb). Commits: base edbb978d → before 1ec420f1 → after 06414b52.
+   Rows, verbatim (edbb978d..1ec420f1): &lt;r kind="dead-code" sym="src/mention.h::mention_detail::mentionFilesCut" p="src/mention.h:467" gating="1" next="--expand=src/mention.h:mentionFilesCut"/&gt; and &lt;r kind="dead-code" sym="src/mention.h::mention_detail::namesUnkeptPackageIndex" p="src/mention.h:397" gating="1" next="--expand=src/mention.h:namesUnkeptPackageIndex"/&gt;.
+   The mention cap's verdict changed to total &gt; kept.size(), computed from mentionFilesNamedTotal, and the predicates that used to answer it lost their callers. The commit's own words are "Deleted, not acked." Dead predicates beside a live verdict leave the next reader unsure which answer is authoritative. The kind could see them only because PR #127 replaced its blanket "headers are exported" exclusion with the rule that names what a language invokes (09d4f5fc).
+   The limit, disclosed: namesFileNotKept was deleted too, but no row named it, because its only caller was itself dead. Catalog improvement path IP-8, "Dead code is one hop deep".
+   Reproduce: base=edbb978d before=1ec420f1 after=06414b52; git worktree add --detach ../qd-before $before; ./build/ripwire ../qd-before --quality-delta=$base..$before --scope=src/mention.h --legend=compact → both rows, gating="2", exit 2; with $base..$after → new-symbol rows only, gating="0", exit 0. Re-run 2026-09-11 with a built_from=766913d02 build: both match the catalog.
+4. duplication: withHeaderAttrAfter | withHeaderField  tokens="122"
+   Catalog §3, "duplication, Type-3: two header writers that each located the same digit run" (catalog commit 553dbadb). Commits: base e3b52d39 → before cf24501d → after 6ef4cb0f.
+   Row, verbatim (e3b52d39..cf24501d): &lt;r kind="duplication" members="src/recall.h::rw::withHeaderAttrAfter | src/recall.h::rw::withHeaderField" tokens="122" p="src/recall.h:1058" gating="1"/&gt;. withHeaderField spelled the same locator, then replace() instead of insert().
+   The locator is now headerFieldDigits, defined once beside the two writers, and each writer states only its own difference: insert or replace. The detector does not agree this is finished. Against the same base the after-tree still gates on the pair: &lt;r kind="duplication" members="src/recall.h::rw::withHeaderAttrAfter | src/recall.h::rw::withHeaderField" tokens="63" p="src/recall.h:1069" gating="1"/&gt;. The catalog classes that residue as a false positive, improvement path IP-4, "An extraction's residue still gates": what the two writers still share is the call to their common helper.
+   Reproduce: base=e3b52d39 before=cf24501d after=6ef4cb0f; git worktree add --detach ../qd-before $before; ./build/ripwire ../qd-before --quality-delta=$base..$before --scope=src/recall.h --legend=compact → tokens="122", gating="1", exit 2; with $base..$after → tokens="63", gating="1", exit 2. Re-run 2026-09-11 with a built_from=766913d02 build: both match the catalog.</a:t>
             </a:r>
             <a:endParaRPr lang="en-US" dirty="0"/>
           </a:p>
@@ -26962,7 +26982,7 @@
                 <a:ea typeface="Courier New" pitchFamily="34" charset="-122"/>
                 <a:cs typeface="Courier New" pitchFamily="34" charset="-120"/>
               </a:rPr>
-              <a:t>// examples from docs/QUALITY_DELTA_CATALOG.md — each one reproduced, none invented</a:t>
+              <a:t>// real findings from ripwire's own history — each one re-derived by a command</a:t>
             </a:r>
             <a:endParaRPr lang="en-US" sz="1300" dirty="0"/>
           </a:p>
@@ -27016,21 +27036,21 @@
         <p:spPr>
           <a:xfrm>
             <a:off x="566928" y="1591056"/>
-            <a:ext cx="11055096" cy="1463040"/>
+            <a:ext cx="5463540" cy="2258568"/>
           </a:xfrm>
           <a:prstGeom prst="roundRect">
             <a:avLst>
-              <a:gd name="adj" fmla="val 5625"/>
+              <a:gd name="adj" fmla="val 3644"/>
             </a:avLst>
           </a:prstGeom>
           <a:solidFill>
             <a:srgbClr val="161D28"/>
           </a:solidFill>
-          <a:ln w="12700">
+          <a:ln w="9525">
             <a:solidFill>
-              <a:srgbClr val="3A4353"/>
+              <a:srgbClr val="232D3D"/>
             </a:solidFill>
-            <a:prstDash val="dash"/>
+            <a:prstDash val="solid"/>
           </a:ln>
         </p:spPr>
       </p:sp>
@@ -27042,8 +27062,8 @@
         </p:nvSpPr>
         <p:spPr>
           <a:xfrm>
-            <a:off x="731520" y="1664208"/>
-            <a:ext cx="2011680" cy="274320"/>
+            <a:off x="694944" y="1645920"/>
+            <a:ext cx="2289048" cy="274320"/>
           </a:xfrm>
           <a:prstGeom prst="rect">
             <a:avLst/>
@@ -27061,13 +27081,13 @@
             <a:r>
               <a:rPr lang="en-US" sz="1100" b="1" dirty="0">
                 <a:solidFill>
-                  <a:srgbClr val="8B95A5"/>
-                </a:solidFill>
-                <a:latin typeface="Courier New" pitchFamily="34" charset="0"/>
-                <a:ea typeface="Courier New" pitchFamily="34" charset="-122"/>
-                <a:cs typeface="Courier New" pitchFamily="34" charset="-120"/>
-              </a:rPr>
-              <a:t>‹kind›</a:t>
+                  <a:srgbClr val="F2B84B"/>
+                </a:solidFill>
+                <a:latin typeface="Courier New" pitchFamily="34" charset="0"/>
+                <a:ea typeface="Courier New" pitchFamily="34" charset="-122"/>
+                <a:cs typeface="Courier New" pitchFamily="34" charset="-120"/>
+              </a:rPr>
+              <a:t>new-clone-of-reused-helper</a:t>
             </a:r>
             <a:endParaRPr lang="en-US" sz="1100" dirty="0"/>
           </a:p>
@@ -27081,34 +27101,34 @@
         </p:nvSpPr>
         <p:spPr>
           <a:xfrm>
-            <a:off x="2807208" y="1664208"/>
-            <a:ext cx="8650224" cy="274320"/>
-          </a:xfrm>
-          <a:prstGeom prst="rect">
-            <a:avLst/>
-          </a:prstGeom>
-          <a:noFill/>
-          <a:ln/>
-        </p:spPr>
-        <p:txBody>
-          <a:bodyPr wrap="square" lIns="0" tIns="0" rIns="0" bIns="0" rtlCol="0" anchor="ctr"/>
-          <a:lstStyle/>
-          <a:p>
-            <a:pPr indent="0" marL="0">
-              <a:buNone/>
-            </a:pPr>
-            <a:r>
-              <a:rPr lang="en-US" sz="1050" dirty="0">
-                <a:solidFill>
-                  <a:srgbClr val="8B95A5"/>
-                </a:solidFill>
-                <a:latin typeface="Arial" pitchFamily="34" charset="0"/>
-                <a:ea typeface="Arial" pitchFamily="34" charset="-122"/>
-                <a:cs typeface="Arial" pitchFamily="34" charset="-120"/>
-              </a:rPr>
-              <a:t>‹the finding, as the tool prints it›</a:t>
-            </a:r>
-            <a:endParaRPr lang="en-US" sz="1050" dirty="0"/>
+            <a:off x="3075432" y="1645920"/>
+            <a:ext cx="2827020" cy="274320"/>
+          </a:xfrm>
+          <a:prstGeom prst="rect">
+            <a:avLst/>
+          </a:prstGeom>
+          <a:noFill/>
+          <a:ln/>
+        </p:spPr>
+        <p:txBody>
+          <a:bodyPr wrap="square" lIns="0" tIns="0" rIns="0" bIns="0" rtlCol="0" anchor="ctr"/>
+          <a:lstStyle/>
+          <a:p>
+            <a:pPr indent="0" marL="0">
+              <a:buNone/>
+            </a:pPr>
+            <a:r>
+              <a:rPr lang="en-US" sz="1000" dirty="0">
+                <a:solidFill>
+                  <a:srgbClr val="E6EDF3"/>
+                </a:solidFill>
+                <a:latin typeface="Arial" pitchFamily="34" charset="0"/>
+                <a:ea typeface="Arial" pitchFamily="34" charset="-122"/>
+                <a:cs typeface="Arial" pitchFamily="34" charset="-120"/>
+              </a:rPr>
+              <a:t>registeredMacroNames | vendoredPathPrefixes</a:t>
+            </a:r>
+            <a:endParaRPr lang="en-US" sz="1000" dirty="0"/>
           </a:p>
         </p:txBody>
       </p:sp>
@@ -27120,8 +27140,8 @@
         </p:nvSpPr>
         <p:spPr>
           <a:xfrm>
-            <a:off x="731520" y="1993392"/>
-            <a:ext cx="5308092" cy="676656"/>
+            <a:off x="694944" y="1975104"/>
+            <a:ext cx="2558034" cy="1527048"/>
           </a:xfrm>
           <a:prstGeom prst="rect">
             <a:avLst/>
@@ -27145,17 +27165,56 @@
         </p:nvSpPr>
         <p:spPr>
           <a:xfrm>
-            <a:off x="804672" y="2020824"/>
-            <a:ext cx="5161788" cy="182880"/>
-          </a:xfrm>
-          <a:prstGeom prst="rect">
-            <a:avLst/>
-          </a:prstGeom>
-          <a:noFill/>
-          <a:ln/>
-        </p:spPr>
-        <p:txBody>
-          <a:bodyPr wrap="square" lIns="0" tIns="0" rIns="0" bIns="0" rtlCol="0" anchor="ctr"/>
+            <a:off x="749808" y="2002536"/>
+            <a:ext cx="2448306" cy="155448"/>
+          </a:xfrm>
+          <a:prstGeom prst="rect">
+            <a:avLst/>
+          </a:prstGeom>
+          <a:noFill/>
+          <a:ln/>
+        </p:spPr>
+        <p:txBody>
+          <a:bodyPr wrap="square" lIns="0" tIns="0" rIns="0" bIns="0" rtlCol="0" anchor="ctr"/>
+          <a:lstStyle/>
+          <a:p>
+            <a:pPr indent="0" marL="0">
+              <a:buNone/>
+            </a:pPr>
+            <a:r>
+              <a:rPr lang="en-US" sz="750" dirty="0">
+                <a:solidFill>
+                  <a:srgbClr val="8B95A5"/>
+                </a:solidFill>
+                <a:latin typeface="Courier New" pitchFamily="34" charset="0"/>
+                <a:ea typeface="Courier New" pitchFamily="34" charset="-122"/>
+                <a:cs typeface="Courier New" pitchFamily="34" charset="-120"/>
+              </a:rPr>
+              <a:t>before</a:t>
+            </a:r>
+            <a:endParaRPr lang="en-US" sz="750" dirty="0"/>
+          </a:p>
+        </p:txBody>
+      </p:sp>
+      <p:sp>
+        <p:nvSpPr>
+          <p:cNvPr id="9" name="Text 7"/>
+          <p:cNvSpPr/>
+          <p:nvPr/>
+        </p:nvSpPr>
+        <p:spPr>
+          <a:xfrm>
+            <a:off x="749808" y="2167128"/>
+            <a:ext cx="2448306" cy="1307592"/>
+          </a:xfrm>
+          <a:prstGeom prst="rect">
+            <a:avLst/>
+          </a:prstGeom>
+          <a:noFill/>
+          <a:ln/>
+        </p:spPr>
+        <p:txBody>
+          <a:bodyPr wrap="square" lIns="0" tIns="0" rIns="0" bIns="0" rtlCol="0" anchor="t"/>
           <a:lstStyle/>
           <a:p>
             <a:pPr indent="0" marL="0">
@@ -27164,54 +27223,168 @@
             <a:r>
               <a:rPr lang="en-US" sz="800" dirty="0">
                 <a:solidFill>
-                  <a:srgbClr val="8B95A5"/>
-                </a:solidFill>
-                <a:latin typeface="Courier New" pitchFamily="34" charset="0"/>
-                <a:ea typeface="Courier New" pitchFamily="34" charset="-122"/>
-                <a:cs typeface="Courier New" pitchFamily="34" charset="-120"/>
-              </a:rPr>
-              <a:t>before</a:t>
+                  <a:srgbClr val="E6EDF3"/>
+                </a:solidFill>
+                <a:latin typeface="Courier New" pitchFamily="34" charset="0"/>
+                <a:ea typeface="Courier New" pitchFamily="34" charset="-122"/>
+                <a:cs typeface="Courier New" pitchFamily="34" charset="-120"/>
+              </a:rPr>
+              <a:t>std::vector&lt;std::string&gt; out;</a:t>
             </a:r>
             <a:endParaRPr lang="en-US" sz="800" dirty="0"/>
           </a:p>
-        </p:txBody>
-      </p:sp>
-      <p:sp>
-        <p:nvSpPr>
-          <p:cNvPr id="9" name="Text 7"/>
-          <p:cNvSpPr/>
-          <p:nvPr/>
-        </p:nvSpPr>
-        <p:spPr>
-          <a:xfrm>
-            <a:off x="804672" y="2212848"/>
-            <a:ext cx="5161788" cy="420624"/>
-          </a:xfrm>
-          <a:prstGeom prst="rect">
-            <a:avLst/>
-          </a:prstGeom>
-          <a:noFill/>
-          <a:ln/>
-        </p:spPr>
-        <p:txBody>
-          <a:bodyPr wrap="square" lIns="0" tIns="0" rIns="0" bIns="0" rtlCol="0" anchor="t"/>
-          <a:lstStyle/>
-          <a:p>
-            <a:pPr indent="0" marL="0">
-              <a:buNone/>
-            </a:pPr>
-            <a:r>
-              <a:rPr lang="en-US" sz="950" dirty="0">
-                <a:solidFill>
-                  <a:srgbClr val="8B95A5"/>
-                </a:solidFill>
-                <a:latin typeface="Courier New" pitchFamily="34" charset="0"/>
-                <a:ea typeface="Courier New" pitchFamily="34" charset="-122"/>
-                <a:cs typeface="Courier New" pitchFamily="34" charset="-120"/>
-              </a:rPr>
-              <a:t>‹before›</a:t>
-            </a:r>
-            <a:endParaRPr lang="en-US" sz="950" dirty="0"/>
+          <a:p>
+            <a:pPr indent="0" marL="0">
+              <a:buNone/>
+            </a:pPr>
+            <a:r>
+              <a:rPr lang="en-US" sz="800" dirty="0">
+                <a:solidFill>
+                  <a:srgbClr val="E6EDF3"/>
+                </a:solidFill>
+                <a:latin typeface="Courier New" pitchFamily="34" charset="0"/>
+                <a:ea typeface="Courier New" pitchFamily="34" charset="-122"/>
+                <a:cs typeface="Courier New" pitchFamily="34" charset="-120"/>
+              </a:rPr>
+              <a:t>for( std::string_view p :</a:t>
+            </a:r>
+            <a:endParaRPr lang="en-US" sz="800" dirty="0"/>
+          </a:p>
+          <a:p>
+            <a:pPr indent="0" marL="0">
+              <a:buNone/>
+            </a:pPr>
+            <a:r>
+              <a:rPr lang="en-US" sz="800" dirty="0">
+                <a:solidFill>
+                  <a:srgbClr val="E6EDF3"/>
+                </a:solidFill>
+                <a:latin typeface="Courier New" pitchFamily="34" charset="0"/>
+                <a:ea typeface="Courier New" pitchFamily="34" charset="-122"/>
+                <a:cs typeface="Courier New" pitchFamily="34" charset="-120"/>
+              </a:rPr>
+              <a:t>     kBuiltinVendoredPrefixes )</a:t>
+            </a:r>
+            <a:endParaRPr lang="en-US" sz="800" dirty="0"/>
+          </a:p>
+          <a:p>
+            <a:pPr indent="0" marL="0">
+              <a:buNone/>
+            </a:pPr>
+            <a:r>
+              <a:rPr lang="en-US" sz="800" dirty="0">
+                <a:solidFill>
+                  <a:srgbClr val="E6EDF3"/>
+                </a:solidFill>
+                <a:latin typeface="Courier New" pitchFamily="34" charset="0"/>
+                <a:ea typeface="Courier New" pitchFamily="34" charset="-122"/>
+                <a:cs typeface="Courier New" pitchFamily="34" charset="-120"/>
+              </a:rPr>
+              <a:t>{ … }</a:t>
+            </a:r>
+            <a:endParaRPr lang="en-US" sz="800" dirty="0"/>
+          </a:p>
+          <a:p>
+            <a:pPr indent="0" marL="0">
+              <a:buNone/>
+            </a:pPr>
+            <a:r>
+              <a:rPr lang="en-US" sz="800" dirty="0">
+                <a:solidFill>
+                  <a:srgbClr val="E6EDF3"/>
+                </a:solidFill>
+                <a:latin typeface="Courier New" pitchFamily="34" charset="0"/>
+                <a:ea typeface="Courier New" pitchFamily="34" charset="-122"/>
+                <a:cs typeface="Courier New" pitchFamily="34" charset="-120"/>
+              </a:rPr>
+              <a:t>for( std::string&amp; extra :</a:t>
+            </a:r>
+            <a:endParaRPr lang="en-US" sz="800" dirty="0"/>
+          </a:p>
+          <a:p>
+            <a:pPr indent="0" marL="0">
+              <a:buNone/>
+            </a:pPr>
+            <a:r>
+              <a:rPr lang="en-US" sz="800" dirty="0">
+                <a:solidFill>
+                  <a:srgbClr val="E6EDF3"/>
+                </a:solidFill>
+                <a:latin typeface="Courier New" pitchFamily="34" charset="0"/>
+                <a:ea typeface="Courier New" pitchFamily="34" charset="-122"/>
+                <a:cs typeface="Courier New" pitchFamily="34" charset="-120"/>
+              </a:rPr>
+              <a:t>     readRegisterMacrosConfig( root )</a:t>
+            </a:r>
+            <a:endParaRPr lang="en-US" sz="800" dirty="0"/>
+          </a:p>
+          <a:p>
+            <a:pPr indent="0" marL="0">
+              <a:buNone/>
+            </a:pPr>
+            <a:r>
+              <a:rPr lang="en-US" sz="800" dirty="0">
+                <a:solidFill>
+                  <a:srgbClr val="E6EDF3"/>
+                </a:solidFill>
+                <a:latin typeface="Courier New" pitchFamily="34" charset="0"/>
+                <a:ea typeface="Courier New" pitchFamily="34" charset="-122"/>
+                <a:cs typeface="Courier New" pitchFamily="34" charset="-120"/>
+              </a:rPr>
+              <a:t>         .vendoredPaths )</a:t>
+            </a:r>
+            <a:endParaRPr lang="en-US" sz="800" dirty="0"/>
+          </a:p>
+          <a:p>
+            <a:pPr indent="0" marL="0">
+              <a:buNone/>
+            </a:pPr>
+            <a:r>
+              <a:rPr lang="en-US" sz="800" dirty="0">
+                <a:solidFill>
+                  <a:srgbClr val="E6EDF3"/>
+                </a:solidFill>
+                <a:latin typeface="Courier New" pitchFamily="34" charset="0"/>
+                <a:ea typeface="Courier New" pitchFamily="34" charset="-122"/>
+                <a:cs typeface="Courier New" pitchFamily="34" charset="-120"/>
+              </a:rPr>
+              <a:t>{ … }</a:t>
+            </a:r>
+            <a:endParaRPr lang="en-US" sz="800" dirty="0"/>
+          </a:p>
+          <a:p>
+            <a:pPr indent="0" marL="0">
+              <a:buNone/>
+            </a:pPr>
+            <a:r>
+              <a:rPr lang="en-US" sz="800" dirty="0">
+                <a:solidFill>
+                  <a:srgbClr val="E6EDF3"/>
+                </a:solidFill>
+                <a:latin typeface="Courier New" pitchFamily="34" charset="0"/>
+                <a:ea typeface="Courier New" pitchFamily="34" charset="-122"/>
+                <a:cs typeface="Courier New" pitchFamily="34" charset="-120"/>
+              </a:rPr>
+              <a:t>std::sort( out.begin(), out.end() );</a:t>
+            </a:r>
+            <a:endParaRPr lang="en-US" sz="800" dirty="0"/>
+          </a:p>
+          <a:p>
+            <a:pPr indent="0" marL="0">
+              <a:buNone/>
+            </a:pPr>
+            <a:r>
+              <a:rPr lang="en-US" sz="800" dirty="0">
+                <a:solidFill>
+                  <a:srgbClr val="E6EDF3"/>
+                </a:solidFill>
+                <a:latin typeface="Courier New" pitchFamily="34" charset="0"/>
+                <a:ea typeface="Courier New" pitchFamily="34" charset="-122"/>
+                <a:cs typeface="Courier New" pitchFamily="34" charset="-120"/>
+              </a:rPr>
+              <a:t>out.erase( std::unique( … ), … );</a:t>
+            </a:r>
+            <a:endParaRPr lang="en-US" sz="800" dirty="0"/>
           </a:p>
         </p:txBody>
       </p:sp>
@@ -27223,8 +27396,8 @@
         </p:nvSpPr>
         <p:spPr>
           <a:xfrm>
-            <a:off x="6149340" y="1993392"/>
-            <a:ext cx="5308092" cy="676656"/>
+            <a:off x="3344418" y="1975104"/>
+            <a:ext cx="2558034" cy="1527048"/>
           </a:xfrm>
           <a:prstGeom prst="rect">
             <a:avLst/>
@@ -27248,17 +27421,56 @@
         </p:nvSpPr>
         <p:spPr>
           <a:xfrm>
-            <a:off x="6222492" y="2020824"/>
-            <a:ext cx="5161788" cy="182880"/>
-          </a:xfrm>
-          <a:prstGeom prst="rect">
-            <a:avLst/>
-          </a:prstGeom>
-          <a:noFill/>
-          <a:ln/>
-        </p:spPr>
-        <p:txBody>
-          <a:bodyPr wrap="square" lIns="0" tIns="0" rIns="0" bIns="0" rtlCol="0" anchor="ctr"/>
+            <a:off x="3399282" y="2002536"/>
+            <a:ext cx="2448306" cy="155448"/>
+          </a:xfrm>
+          <a:prstGeom prst="rect">
+            <a:avLst/>
+          </a:prstGeom>
+          <a:noFill/>
+          <a:ln/>
+        </p:spPr>
+        <p:txBody>
+          <a:bodyPr wrap="square" lIns="0" tIns="0" rIns="0" bIns="0" rtlCol="0" anchor="ctr"/>
+          <a:lstStyle/>
+          <a:p>
+            <a:pPr indent="0" marL="0">
+              <a:buNone/>
+            </a:pPr>
+            <a:r>
+              <a:rPr lang="en-US" sz="750" dirty="0">
+                <a:solidFill>
+                  <a:srgbClr val="8B95A5"/>
+                </a:solidFill>
+                <a:latin typeface="Courier New" pitchFamily="34" charset="0"/>
+                <a:ea typeface="Courier New" pitchFamily="34" charset="-122"/>
+                <a:cs typeface="Courier New" pitchFamily="34" charset="-120"/>
+              </a:rPr>
+              <a:t>after</a:t>
+            </a:r>
+            <a:endParaRPr lang="en-US" sz="750" dirty="0"/>
+          </a:p>
+        </p:txBody>
+      </p:sp>
+      <p:sp>
+        <p:nvSpPr>
+          <p:cNvPr id="12" name="Text 10"/>
+          <p:cNvSpPr/>
+          <p:nvPr/>
+        </p:nvSpPr>
+        <p:spPr>
+          <a:xfrm>
+            <a:off x="3399282" y="2167128"/>
+            <a:ext cx="2448306" cy="1307592"/>
+          </a:xfrm>
+          <a:prstGeom prst="rect">
+            <a:avLst/>
+          </a:prstGeom>
+          <a:noFill/>
+          <a:ln/>
+        </p:spPr>
+        <p:txBody>
+          <a:bodyPr wrap="square" lIns="0" tIns="0" rIns="0" bIns="0" rtlCol="0" anchor="t"/>
           <a:lstStyle/>
           <a:p>
             <a:pPr indent="0" marL="0">
@@ -27267,52 +27479,205 @@
             <a:r>
               <a:rPr lang="en-US" sz="800" dirty="0">
                 <a:solidFill>
+                  <a:srgbClr val="E6EDF3"/>
+                </a:solidFill>
+                <a:latin typeface="Courier New" pitchFamily="34" charset="0"/>
+                <a:ea typeface="Courier New" pitchFamily="34" charset="-122"/>
+                <a:cs typeface="Courier New" pitchFamily="34" charset="-120"/>
+              </a:rPr>
+              <a:t>inline std::vector&lt;std::string&gt;</a:t>
+            </a:r>
+            <a:endParaRPr lang="en-US" sz="800" dirty="0"/>
+          </a:p>
+          <a:p>
+            <a:pPr indent="0" marL="0">
+              <a:buNone/>
+            </a:pPr>
+            <a:r>
+              <a:rPr lang="en-US" sz="800" dirty="0">
+                <a:solidFill>
+                  <a:srgbClr val="E6EDF3"/>
+                </a:solidFill>
+                <a:latin typeface="Courier New" pitchFamily="34" charset="0"/>
+                <a:ea typeface="Courier New" pitchFamily="34" charset="-122"/>
+                <a:cs typeface="Courier New" pitchFamily="34" charset="-120"/>
+              </a:rPr>
+              <a:t>mergeBuiltinsWithConfig( … builtins,</a:t>
+            </a:r>
+            <a:endParaRPr lang="en-US" sz="800" dirty="0"/>
+          </a:p>
+          <a:p>
+            <a:pPr indent="0" marL="0">
+              <a:buNone/>
+            </a:pPr>
+            <a:r>
+              <a:rPr lang="en-US" sz="800" dirty="0">
+                <a:solidFill>
+                  <a:srgbClr val="E6EDF3"/>
+                </a:solidFill>
+                <a:latin typeface="Courier New" pitchFamily="34" charset="0"/>
+                <a:ea typeface="Courier New" pitchFamily="34" charset="-122"/>
+                <a:cs typeface="Courier New" pitchFamily="34" charset="-120"/>
+              </a:rPr>
+              <a:t>    … fromConfig )</a:t>
+            </a:r>
+            <a:endParaRPr lang="en-US" sz="800" dirty="0"/>
+          </a:p>
+          <a:p>
+            <a:pPr indent="0" marL="0">
+              <a:buNone/>
+            </a:pPr>
+            <a:r>
+              <a:rPr lang="en-US" sz="800" dirty="0">
+                <a:solidFill>
+                  <a:srgbClr val="E6EDF3"/>
+                </a:solidFill>
+                <a:latin typeface="Courier New" pitchFamily="34" charset="0"/>
+                <a:ea typeface="Courier New" pitchFamily="34" charset="-122"/>
+                <a:cs typeface="Courier New" pitchFamily="34" charset="-120"/>
+              </a:rPr>
+              <a:t>// … reserve, append both lists,</a:t>
+            </a:r>
+            <a:endParaRPr lang="en-US" sz="800" dirty="0"/>
+          </a:p>
+          <a:p>
+            <a:pPr indent="0" marL="0">
+              <a:buNone/>
+            </a:pPr>
+            <a:r>
+              <a:rPr lang="en-US" sz="800" dirty="0">
+                <a:solidFill>
+                  <a:srgbClr val="E6EDF3"/>
+                </a:solidFill>
+                <a:latin typeface="Courier New" pitchFamily="34" charset="0"/>
+                <a:ea typeface="Courier New" pitchFamily="34" charset="-122"/>
+                <a:cs typeface="Courier New" pitchFamily="34" charset="-120"/>
+              </a:rPr>
+              <a:t>//   sort, unique</a:t>
+            </a:r>
+            <a:endParaRPr lang="en-US" sz="800" dirty="0"/>
+          </a:p>
+          <a:p>
+            <a:pPr indent="0" marL="0">
+              <a:buNone/>
+            </a:pPr>
+            <a:r>
+              <a:rPr lang="en-US" sz="800" dirty="0">
+                <a:solidFill>
+                  <a:srgbClr val="E6EDF3"/>
+                </a:solidFill>
+                <a:latin typeface="Courier New" pitchFamily="34" charset="0"/>
+                <a:ea typeface="Courier New" pitchFamily="34" charset="-122"/>
+                <a:cs typeface="Courier New" pitchFamily="34" charset="-120"/>
+              </a:rPr>
+              <a:t>// vendoredPathPrefixes( root ):</a:t>
+            </a:r>
+            <a:endParaRPr lang="en-US" sz="800" dirty="0"/>
+          </a:p>
+          <a:p>
+            <a:pPr indent="0" marL="0">
+              <a:buNone/>
+            </a:pPr>
+            <a:r>
+              <a:rPr lang="en-US" sz="800" dirty="0">
+                <a:solidFill>
+                  <a:srgbClr val="E6EDF3"/>
+                </a:solidFill>
+                <a:latin typeface="Courier New" pitchFamily="34" charset="0"/>
+                <a:ea typeface="Courier New" pitchFamily="34" charset="-122"/>
+                <a:cs typeface="Courier New" pitchFamily="34" charset="-120"/>
+              </a:rPr>
+              <a:t>return mergeBuiltinsWithConfig(</a:t>
+            </a:r>
+            <a:endParaRPr lang="en-US" sz="800" dirty="0"/>
+          </a:p>
+          <a:p>
+            <a:pPr indent="0" marL="0">
+              <a:buNone/>
+            </a:pPr>
+            <a:r>
+              <a:rPr lang="en-US" sz="800" dirty="0">
+                <a:solidFill>
+                  <a:srgbClr val="E6EDF3"/>
+                </a:solidFill>
+                <a:latin typeface="Courier New" pitchFamily="34" charset="0"/>
+                <a:ea typeface="Courier New" pitchFamily="34" charset="-122"/>
+                <a:cs typeface="Courier New" pitchFamily="34" charset="-120"/>
+              </a:rPr>
+              <a:t>    kBuiltinVendoredPrefixes,</a:t>
+            </a:r>
+            <a:endParaRPr lang="en-US" sz="800" dirty="0"/>
+          </a:p>
+          <a:p>
+            <a:pPr indent="0" marL="0">
+              <a:buNone/>
+            </a:pPr>
+            <a:r>
+              <a:rPr lang="en-US" sz="800" dirty="0">
+                <a:solidFill>
+                  <a:srgbClr val="E6EDF3"/>
+                </a:solidFill>
+                <a:latin typeface="Courier New" pitchFamily="34" charset="0"/>
+                <a:ea typeface="Courier New" pitchFamily="34" charset="-122"/>
+                <a:cs typeface="Courier New" pitchFamily="34" charset="-120"/>
+              </a:rPr>
+              <a:t>    readRegisterMacrosConfig( root )</a:t>
+            </a:r>
+            <a:endParaRPr lang="en-US" sz="800" dirty="0"/>
+          </a:p>
+          <a:p>
+            <a:pPr indent="0" marL="0">
+              <a:buNone/>
+            </a:pPr>
+            <a:r>
+              <a:rPr lang="en-US" sz="800" dirty="0">
+                <a:solidFill>
+                  <a:srgbClr val="E6EDF3"/>
+                </a:solidFill>
+                <a:latin typeface="Courier New" pitchFamily="34" charset="0"/>
+                <a:ea typeface="Courier New" pitchFamily="34" charset="-122"/>
+                <a:cs typeface="Courier New" pitchFamily="34" charset="-120"/>
+              </a:rPr>
+              <a:t>        .vendoredPaths );</a:t>
+            </a:r>
+            <a:endParaRPr lang="en-US" sz="800" dirty="0"/>
+          </a:p>
+        </p:txBody>
+      </p:sp>
+      <p:sp>
+        <p:nvSpPr>
+          <p:cNvPr id="13" name="Text 11"/>
+          <p:cNvSpPr/>
+          <p:nvPr/>
+        </p:nvSpPr>
+        <p:spPr>
+          <a:xfrm>
+            <a:off x="694944" y="3529584"/>
+            <a:ext cx="5207508" cy="274320"/>
+          </a:xfrm>
+          <a:prstGeom prst="rect">
+            <a:avLst/>
+          </a:prstGeom>
+          <a:noFill/>
+          <a:ln/>
+        </p:spPr>
+        <p:txBody>
+          <a:bodyPr wrap="square" lIns="0" tIns="0" rIns="0" bIns="0" rtlCol="0" anchor="ctr"/>
+          <a:lstStyle/>
+          <a:p>
+            <a:pPr indent="0" marL="0">
+              <a:buNone/>
+            </a:pPr>
+            <a:r>
+              <a:rPr lang="en-US" sz="950" i="1" dirty="0">
+                <a:solidFill>
                   <a:srgbClr val="8B95A5"/>
                 </a:solidFill>
-                <a:latin typeface="Courier New" pitchFamily="34" charset="0"/>
-                <a:ea typeface="Courier New" pitchFamily="34" charset="-122"/>
-                <a:cs typeface="Courier New" pitchFamily="34" charset="-120"/>
-              </a:rPr>
-              <a:t>after</a:t>
-            </a:r>
-            <a:endParaRPr lang="en-US" sz="800" dirty="0"/>
-          </a:p>
-        </p:txBody>
-      </p:sp>
-      <p:sp>
-        <p:nvSpPr>
-          <p:cNvPr id="12" name="Text 10"/>
-          <p:cNvSpPr/>
-          <p:nvPr/>
-        </p:nvSpPr>
-        <p:spPr>
-          <a:xfrm>
-            <a:off x="6222492" y="2212848"/>
-            <a:ext cx="5161788" cy="420624"/>
-          </a:xfrm>
-          <a:prstGeom prst="rect">
-            <a:avLst/>
-          </a:prstGeom>
-          <a:noFill/>
-          <a:ln/>
-        </p:spPr>
-        <p:txBody>
-          <a:bodyPr wrap="square" lIns="0" tIns="0" rIns="0" bIns="0" rtlCol="0" anchor="t"/>
-          <a:lstStyle/>
-          <a:p>
-            <a:pPr indent="0" marL="0">
-              <a:buNone/>
-            </a:pPr>
-            <a:r>
-              <a:rPr lang="en-US" sz="950" dirty="0">
-                <a:solidFill>
-                  <a:srgbClr val="8B95A5"/>
-                </a:solidFill>
-                <a:latin typeface="Courier New" pitchFamily="34" charset="0"/>
-                <a:ea typeface="Courier New" pitchFamily="34" charset="-122"/>
-                <a:cs typeface="Courier New" pitchFamily="34" charset="-120"/>
-              </a:rPr>
-              <a:t>‹after›</a:t>
+                <a:latin typeface="Arial" pitchFamily="34" charset="0"/>
+                <a:ea typeface="Arial" pitchFamily="34" charset="-122"/>
+                <a:cs typeface="Arial" pitchFamily="34" charset="-120"/>
+              </a:rPr>
+              <a:t>A helper with three callers, copied while building the feature that measures copies.</a:t>
             </a:r>
             <a:endParaRPr lang="en-US" sz="950" dirty="0"/>
           </a:p>
@@ -27320,67 +27685,28 @@
       </p:sp>
       <p:sp>
         <p:nvSpPr>
-          <p:cNvPr id="13" name="Text 11"/>
-          <p:cNvSpPr/>
-          <p:nvPr/>
-        </p:nvSpPr>
-        <p:spPr>
-          <a:xfrm>
-            <a:off x="731520" y="2706624"/>
-            <a:ext cx="10725912" cy="292608"/>
-          </a:xfrm>
-          <a:prstGeom prst="rect">
-            <a:avLst/>
-          </a:prstGeom>
-          <a:noFill/>
-          <a:ln/>
-        </p:spPr>
-        <p:txBody>
-          <a:bodyPr wrap="square" lIns="0" tIns="0" rIns="0" bIns="0" rtlCol="0" anchor="ctr"/>
-          <a:lstStyle/>
-          <a:p>
-            <a:pPr indent="0" marL="0">
-              <a:buNone/>
-            </a:pPr>
-            <a:r>
-              <a:rPr lang="en-US" sz="950" i="1" dirty="0">
-                <a:solidFill>
-                  <a:srgbClr val="8B95A5"/>
-                </a:solidFill>
-                <a:latin typeface="Arial" pitchFamily="34" charset="0"/>
-                <a:ea typeface="Arial" pitchFamily="34" charset="-122"/>
-                <a:cs typeface="Arial" pitchFamily="34" charset="-120"/>
-              </a:rPr>
-              <a:t>‹why it matters, in one sentence›</a:t>
-            </a:r>
-            <a:endParaRPr lang="en-US" sz="950" dirty="0"/>
-          </a:p>
-        </p:txBody>
-      </p:sp>
-      <p:sp>
-        <p:nvSpPr>
           <p:cNvPr id="14" name="Shape 12"/>
           <p:cNvSpPr/>
           <p:nvPr/>
         </p:nvSpPr>
         <p:spPr>
           <a:xfrm>
-            <a:off x="566928" y="3182112"/>
-            <a:ext cx="11055096" cy="1463040"/>
+            <a:off x="6158484" y="1591056"/>
+            <a:ext cx="5463540" cy="2258568"/>
           </a:xfrm>
           <a:prstGeom prst="roundRect">
             <a:avLst>
-              <a:gd name="adj" fmla="val 5625"/>
+              <a:gd name="adj" fmla="val 3644"/>
             </a:avLst>
           </a:prstGeom>
           <a:solidFill>
             <a:srgbClr val="161D28"/>
           </a:solidFill>
-          <a:ln w="12700">
+          <a:ln w="9525">
             <a:solidFill>
-              <a:srgbClr val="3A4353"/>
+              <a:srgbClr val="232D3D"/>
             </a:solidFill>
-            <a:prstDash val="dash"/>
+            <a:prstDash val="solid"/>
           </a:ln>
         </p:spPr>
       </p:sp>
@@ -27392,8 +27718,8 @@
         </p:nvSpPr>
         <p:spPr>
           <a:xfrm>
-            <a:off x="731520" y="3255264"/>
-            <a:ext cx="2011680" cy="274320"/>
+            <a:off x="6286500" y="1645920"/>
+            <a:ext cx="822960" cy="274320"/>
           </a:xfrm>
           <a:prstGeom prst="rect">
             <a:avLst/>
@@ -27411,13 +27737,13 @@
             <a:r>
               <a:rPr lang="en-US" sz="1100" b="1" dirty="0">
                 <a:solidFill>
-                  <a:srgbClr val="8B95A5"/>
-                </a:solidFill>
-                <a:latin typeface="Courier New" pitchFamily="34" charset="0"/>
-                <a:ea typeface="Courier New" pitchFamily="34" charset="-122"/>
-                <a:cs typeface="Courier New" pitchFamily="34" charset="-120"/>
-              </a:rPr>
-              <a:t>‹kind›</a:t>
+                  <a:srgbClr val="F2B84B"/>
+                </a:solidFill>
+                <a:latin typeface="Courier New" pitchFamily="34" charset="0"/>
+                <a:ea typeface="Courier New" pitchFamily="34" charset="-122"/>
+                <a:cs typeface="Courier New" pitchFamily="34" charset="-120"/>
+              </a:rPr>
+              <a:t>nesting</a:t>
             </a:r>
             <a:endParaRPr lang="en-US" sz="1100" dirty="0"/>
           </a:p>
@@ -27431,34 +27757,34 @@
         </p:nvSpPr>
         <p:spPr>
           <a:xfrm>
-            <a:off x="2807208" y="3255264"/>
-            <a:ext cx="8650224" cy="274320"/>
-          </a:xfrm>
-          <a:prstGeom prst="rect">
-            <a:avLst/>
-          </a:prstGeom>
-          <a:noFill/>
-          <a:ln/>
-        </p:spPr>
-        <p:txBody>
-          <a:bodyPr wrap="square" lIns="0" tIns="0" rIns="0" bIns="0" rtlCol="0" anchor="ctr"/>
-          <a:lstStyle/>
-          <a:p>
-            <a:pPr indent="0" marL="0">
-              <a:buNone/>
-            </a:pPr>
-            <a:r>
-              <a:rPr lang="en-US" sz="1050" dirty="0">
-                <a:solidFill>
-                  <a:srgbClr val="8B95A5"/>
-                </a:solidFill>
-                <a:latin typeface="Arial" pitchFamily="34" charset="0"/>
-                <a:ea typeface="Arial" pitchFamily="34" charset="-122"/>
-                <a:cs typeface="Arial" pitchFamily="34" charset="-120"/>
-              </a:rPr>
-              <a:t>‹the finding, as the tool prints it›</a:t>
-            </a:r>
-            <a:endParaRPr lang="en-US" sz="1050" dirty="0"/>
+            <a:off x="7200900" y="1645920"/>
+            <a:ext cx="4293108" cy="274320"/>
+          </a:xfrm>
+          <a:prstGeom prst="rect">
+            <a:avLst/>
+          </a:prstGeom>
+          <a:noFill/>
+          <a:ln/>
+        </p:spPr>
+        <p:txBody>
+          <a:bodyPr wrap="square" lIns="0" tIns="0" rIns="0" bIns="0" rtlCol="0" anchor="ctr"/>
+          <a:lstStyle/>
+          <a:p>
+            <a:pPr indent="0" marL="0">
+              <a:buNone/>
+            </a:pPr>
+            <a:r>
+              <a:rPr lang="en-US" sz="1000" dirty="0">
+                <a:solidFill>
+                  <a:srgbClr val="E6EDF3"/>
+                </a:solidFill>
+                <a:latin typeface="Arial" pitchFamily="34" charset="0"/>
+                <a:ea typeface="Arial" pitchFamily="34" charset="-122"/>
+                <a:cs typeface="Arial" pitchFamily="34" charset="-120"/>
+              </a:rPr>
+              <a:t>runChangeViews was="6" now="8" · complexity was="141" now="178"</a:t>
+            </a:r>
+            <a:endParaRPr lang="en-US" sz="1000" dirty="0"/>
           </a:p>
         </p:txBody>
       </p:sp>
@@ -27470,8 +27796,8 @@
         </p:nvSpPr>
         <p:spPr>
           <a:xfrm>
-            <a:off x="731520" y="3584448"/>
-            <a:ext cx="5308092" cy="676656"/>
+            <a:off x="6286500" y="1975104"/>
+            <a:ext cx="2558034" cy="1527048"/>
           </a:xfrm>
           <a:prstGeom prst="rect">
             <a:avLst/>
@@ -27495,17 +27821,56 @@
         </p:nvSpPr>
         <p:spPr>
           <a:xfrm>
-            <a:off x="804672" y="3611880"/>
-            <a:ext cx="5161788" cy="182880"/>
-          </a:xfrm>
-          <a:prstGeom prst="rect">
-            <a:avLst/>
-          </a:prstGeom>
-          <a:noFill/>
-          <a:ln/>
-        </p:spPr>
-        <p:txBody>
-          <a:bodyPr wrap="square" lIns="0" tIns="0" rIns="0" bIns="0" rtlCol="0" anchor="ctr"/>
+            <a:off x="6341364" y="2002536"/>
+            <a:ext cx="2448306" cy="155448"/>
+          </a:xfrm>
+          <a:prstGeom prst="rect">
+            <a:avLst/>
+          </a:prstGeom>
+          <a:noFill/>
+          <a:ln/>
+        </p:spPr>
+        <p:txBody>
+          <a:bodyPr wrap="square" lIns="0" tIns="0" rIns="0" bIns="0" rtlCol="0" anchor="ctr"/>
+          <a:lstStyle/>
+          <a:p>
+            <a:pPr indent="0" marL="0">
+              <a:buNone/>
+            </a:pPr>
+            <a:r>
+              <a:rPr lang="en-US" sz="750" dirty="0">
+                <a:solidFill>
+                  <a:srgbClr val="8B95A5"/>
+                </a:solidFill>
+                <a:latin typeface="Courier New" pitchFamily="34" charset="0"/>
+                <a:ea typeface="Courier New" pitchFamily="34" charset="-122"/>
+                <a:cs typeface="Courier New" pitchFamily="34" charset="-120"/>
+              </a:rPr>
+              <a:t>before</a:t>
+            </a:r>
+            <a:endParaRPr lang="en-US" sz="750" dirty="0"/>
+          </a:p>
+        </p:txBody>
+      </p:sp>
+      <p:sp>
+        <p:nvSpPr>
+          <p:cNvPr id="19" name="Text 17"/>
+          <p:cNvSpPr/>
+          <p:nvPr/>
+        </p:nvSpPr>
+        <p:spPr>
+          <a:xfrm>
+            <a:off x="6341364" y="2167128"/>
+            <a:ext cx="2448306" cy="1307592"/>
+          </a:xfrm>
+          <a:prstGeom prst="rect">
+            <a:avLst/>
+          </a:prstGeom>
+          <a:noFill/>
+          <a:ln/>
+        </p:spPr>
+        <p:txBody>
+          <a:bodyPr wrap="square" lIns="0" tIns="0" rIns="0" bIns="0" rtlCol="0" anchor="t"/>
           <a:lstStyle/>
           <a:p>
             <a:pPr indent="0" marL="0">
@@ -27514,54 +27879,168 @@
             <a:r>
               <a:rPr lang="en-US" sz="800" dirty="0">
                 <a:solidFill>
-                  <a:srgbClr val="8B95A5"/>
-                </a:solidFill>
-                <a:latin typeface="Courier New" pitchFamily="34" charset="0"/>
-                <a:ea typeface="Courier New" pitchFamily="34" charset="-122"/>
-                <a:cs typeface="Courier New" pitchFamily="34" charset="-120"/>
-              </a:rPr>
-              <a:t>before</a:t>
+                  <a:srgbClr val="E6EDF3"/>
+                </a:solidFill>
+                <a:latin typeface="Courier New" pitchFamily="34" charset="0"/>
+                <a:ea typeface="Courier New" pitchFamily="34" charset="-122"/>
+                <a:cs typeface="Courier New" pitchFamily="34" charset="-120"/>
+              </a:rPr>
+              <a:t>for( … o &lt; ws.size(); ++o )</a:t>
             </a:r>
             <a:endParaRPr lang="en-US" sz="800" dirty="0"/>
           </a:p>
-        </p:txBody>
-      </p:sp>
-      <p:sp>
-        <p:nvSpPr>
-          <p:cNvPr id="19" name="Text 17"/>
-          <p:cNvSpPr/>
-          <p:nvPr/>
-        </p:nvSpPr>
-        <p:spPr>
-          <a:xfrm>
-            <a:off x="804672" y="3803904"/>
-            <a:ext cx="5161788" cy="420624"/>
-          </a:xfrm>
-          <a:prstGeom prst="rect">
-            <a:avLst/>
-          </a:prstGeom>
-          <a:noFill/>
-          <a:ln/>
-        </p:spPr>
-        <p:txBody>
-          <a:bodyPr wrap="square" lIns="0" tIns="0" rIns="0" bIns="0" rtlCol="0" anchor="t"/>
-          <a:lstStyle/>
-          <a:p>
-            <a:pPr indent="0" marL="0">
-              <a:buNone/>
-            </a:pPr>
-            <a:r>
-              <a:rPr lang="en-US" sz="950" dirty="0">
-                <a:solidFill>
-                  <a:srgbClr val="8B95A5"/>
-                </a:solidFill>
-                <a:latin typeface="Courier New" pitchFamily="34" charset="0"/>
-                <a:ea typeface="Courier New" pitchFamily="34" charset="-122"/>
-                <a:cs typeface="Courier New" pitchFamily="34" charset="-120"/>
-              </a:rPr>
-              <a:t>‹before›</a:t>
-            </a:r>
-            <a:endParaRPr lang="en-US" sz="950" dirty="0"/>
+          <a:p>
+            <a:pPr indent="0" marL="0">
+              <a:buNone/>
+            </a:pPr>
+            <a:r>
+              <a:rPr lang="en-US" sz="800" dirty="0">
+                <a:solidFill>
+                  <a:srgbClr val="E6EDF3"/>
+                </a:solidFill>
+                <a:latin typeface="Courier New" pitchFamily="34" charset="0"/>
+                <a:ea typeface="Courier New" pitchFamily="34" charset="-122"/>
+                <a:cs typeface="Courier New" pitchFamily="34" charset="-120"/>
+              </a:rPr>
+              <a:t>{</a:t>
+            </a:r>
+            <a:endParaRPr lang="en-US" sz="800" dirty="0"/>
+          </a:p>
+          <a:p>
+            <a:pPr indent="0" marL="0">
+              <a:buNone/>
+            </a:pPr>
+            <a:r>
+              <a:rPr lang="en-US" sz="800" dirty="0">
+                <a:solidFill>
+                  <a:srgbClr val="E6EDF3"/>
+                </a:solidFill>
+                <a:latin typeface="Courier New" pitchFamily="34" charset="0"/>
+                <a:ea typeface="Courier New" pitchFamily="34" charset="-122"/>
+                <a:cs typeface="Courier New" pitchFamily="34" charset="-120"/>
+              </a:rPr>
+              <a:t>    if( o == r ) { continue; }</a:t>
+            </a:r>
+            <a:endParaRPr lang="en-US" sz="800" dirty="0"/>
+          </a:p>
+          <a:p>
+            <a:pPr indent="0" marL="0">
+              <a:buNone/>
+            </a:pPr>
+            <a:r>
+              <a:rPr lang="en-US" sz="800" dirty="0">
+                <a:solidFill>
+                  <a:srgbClr val="E6EDF3"/>
+                </a:solidFill>
+                <a:latin typeface="Courier New" pitchFamily="34" charset="0"/>
+                <a:ea typeface="Courier New" pitchFamily="34" charset="-122"/>
+                <a:cs typeface="Courier New" pitchFamily="34" charset="-120"/>
+              </a:rPr>
+              <a:t>    for( char c : perRootChanged[o] )</a:t>
+            </a:r>
+            <a:endParaRPr lang="en-US" sz="800" dirty="0"/>
+          </a:p>
+          <a:p>
+            <a:pPr indent="0" marL="0">
+              <a:buNone/>
+            </a:pPr>
+            <a:r>
+              <a:rPr lang="en-US" sz="800" dirty="0">
+                <a:solidFill>
+                  <a:srgbClr val="E6EDF3"/>
+                </a:solidFill>
+                <a:latin typeface="Courier New" pitchFamily="34" charset="0"/>
+                <a:ea typeface="Courier New" pitchFamily="34" charset="-122"/>
+                <a:cs typeface="Courier New" pitchFamily="34" charset="-120"/>
+              </a:rPr>
+              <a:t>    {</a:t>
+            </a:r>
+            <a:endParaRPr lang="en-US" sz="800" dirty="0"/>
+          </a:p>
+          <a:p>
+            <a:pPr indent="0" marL="0">
+              <a:buNone/>
+            </a:pPr>
+            <a:r>
+              <a:rPr lang="en-US" sz="800" dirty="0">
+                <a:solidFill>
+                  <a:srgbClr val="E6EDF3"/>
+                </a:solidFill>
+                <a:latin typeface="Courier New" pitchFamily="34" charset="0"/>
+                <a:ea typeface="Courier New" pitchFamily="34" charset="-122"/>
+                <a:cs typeface="Courier New" pitchFamily="34" charset="-120"/>
+              </a:rPr>
+              <a:t>        if( c )</a:t>
+            </a:r>
+            <a:endParaRPr lang="en-US" sz="800" dirty="0"/>
+          </a:p>
+          <a:p>
+            <a:pPr indent="0" marL="0">
+              <a:buNone/>
+            </a:pPr>
+            <a:r>
+              <a:rPr lang="en-US" sz="800" dirty="0">
+                <a:solidFill>
+                  <a:srgbClr val="E6EDF3"/>
+                </a:solidFill>
+                <a:latin typeface="Courier New" pitchFamily="34" charset="0"/>
+                <a:ea typeface="Courier New" pitchFamily="34" charset="-122"/>
+                <a:cs typeface="Courier New" pitchFamily="34" charset="-120"/>
+              </a:rPr>
+              <a:t>        {</a:t>
+            </a:r>
+            <a:endParaRPr lang="en-US" sz="800" dirty="0"/>
+          </a:p>
+          <a:p>
+            <a:pPr indent="0" marL="0">
+              <a:buNone/>
+            </a:pPr>
+            <a:r>
+              <a:rPr lang="en-US" sz="800" dirty="0">
+                <a:solidFill>
+                  <a:srgbClr val="E6EDF3"/>
+                </a:solidFill>
+                <a:latin typeface="Courier New" pitchFamily="34" charset="0"/>
+                <a:ea typeface="Courier New" pitchFamily="34" charset="-122"/>
+                <a:cs typeface="Courier New" pitchFamily="34" charset="-120"/>
+              </a:rPr>
+              <a:t>            if( !elsewhere.empty() ) …</a:t>
+            </a:r>
+            <a:endParaRPr lang="en-US" sz="800" dirty="0"/>
+          </a:p>
+          <a:p>
+            <a:pPr indent="0" marL="0">
+              <a:buNone/>
+            </a:pPr>
+            <a:r>
+              <a:rPr lang="en-US" sz="800" dirty="0">
+                <a:solidFill>
+                  <a:srgbClr val="E6EDF3"/>
+                </a:solidFill>
+                <a:latin typeface="Courier New" pitchFamily="34" charset="0"/>
+                <a:ea typeface="Courier New" pitchFamily="34" charset="-122"/>
+                <a:cs typeface="Courier New" pitchFamily="34" charset="-120"/>
+              </a:rPr>
+              <a:t>            elsewhere += ws[o].label;</a:t>
+            </a:r>
+            <a:endParaRPr lang="en-US" sz="800" dirty="0"/>
+          </a:p>
+          <a:p>
+            <a:pPr indent="0" marL="0">
+              <a:buNone/>
+            </a:pPr>
+            <a:r>
+              <a:rPr lang="en-US" sz="800" dirty="0">
+                <a:solidFill>
+                  <a:srgbClr val="E6EDF3"/>
+                </a:solidFill>
+                <a:latin typeface="Courier New" pitchFamily="34" charset="0"/>
+                <a:ea typeface="Courier New" pitchFamily="34" charset="-122"/>
+                <a:cs typeface="Courier New" pitchFamily="34" charset="-120"/>
+              </a:rPr>
+              <a:t>            break;</a:t>
+            </a:r>
+            <a:endParaRPr lang="en-US" sz="800" dirty="0"/>
           </a:p>
         </p:txBody>
       </p:sp>
@@ -27573,8 +28052,8 @@
         </p:nvSpPr>
         <p:spPr>
           <a:xfrm>
-            <a:off x="6149340" y="3584448"/>
-            <a:ext cx="5308092" cy="676656"/>
+            <a:off x="8935974" y="1975104"/>
+            <a:ext cx="2558034" cy="1527048"/>
           </a:xfrm>
           <a:prstGeom prst="rect">
             <a:avLst/>
@@ -27598,17 +28077,56 @@
         </p:nvSpPr>
         <p:spPr>
           <a:xfrm>
-            <a:off x="6222492" y="3611880"/>
-            <a:ext cx="5161788" cy="182880"/>
-          </a:xfrm>
-          <a:prstGeom prst="rect">
-            <a:avLst/>
-          </a:prstGeom>
-          <a:noFill/>
-          <a:ln/>
-        </p:spPr>
-        <p:txBody>
-          <a:bodyPr wrap="square" lIns="0" tIns="0" rIns="0" bIns="0" rtlCol="0" anchor="ctr"/>
+            <a:off x="8990838" y="2002536"/>
+            <a:ext cx="2448306" cy="155448"/>
+          </a:xfrm>
+          <a:prstGeom prst="rect">
+            <a:avLst/>
+          </a:prstGeom>
+          <a:noFill/>
+          <a:ln/>
+        </p:spPr>
+        <p:txBody>
+          <a:bodyPr wrap="square" lIns="0" tIns="0" rIns="0" bIns="0" rtlCol="0" anchor="ctr"/>
+          <a:lstStyle/>
+          <a:p>
+            <a:pPr indent="0" marL="0">
+              <a:buNone/>
+            </a:pPr>
+            <a:r>
+              <a:rPr lang="en-US" sz="750" dirty="0">
+                <a:solidFill>
+                  <a:srgbClr val="8B95A5"/>
+                </a:solidFill>
+                <a:latin typeface="Courier New" pitchFamily="34" charset="0"/>
+                <a:ea typeface="Courier New" pitchFamily="34" charset="-122"/>
+                <a:cs typeface="Courier New" pitchFamily="34" charset="-120"/>
+              </a:rPr>
+              <a:t>after</a:t>
+            </a:r>
+            <a:endParaRPr lang="en-US" sz="750" dirty="0"/>
+          </a:p>
+        </p:txBody>
+      </p:sp>
+      <p:sp>
+        <p:nvSpPr>
+          <p:cNvPr id="22" name="Text 20"/>
+          <p:cNvSpPr/>
+          <p:nvPr/>
+        </p:nvSpPr>
+        <p:spPr>
+          <a:xfrm>
+            <a:off x="8990838" y="2167128"/>
+            <a:ext cx="2448306" cy="1307592"/>
+          </a:xfrm>
+          <a:prstGeom prst="rect">
+            <a:avLst/>
+          </a:prstGeom>
+          <a:noFill/>
+          <a:ln/>
+        </p:spPr>
+        <p:txBody>
+          <a:bodyPr wrap="square" lIns="0" tIns="0" rIns="0" bIns="0" rtlCol="0" anchor="t"/>
           <a:lstStyle/>
           <a:p>
             <a:pPr indent="0" marL="0">
@@ -27617,52 +28135,205 @@
             <a:r>
               <a:rPr lang="en-US" sz="800" dirty="0">
                 <a:solidFill>
+                  <a:srgbClr val="E6EDF3"/>
+                </a:solidFill>
+                <a:latin typeface="Courier New" pitchFamily="34" charset="0"/>
+                <a:ea typeface="Courier New" pitchFamily="34" charset="-122"/>
+                <a:cs typeface="Courier New" pitchFamily="34" charset="-120"/>
+              </a:rPr>
+              <a:t>const std::string elsewhere =</a:t>
+            </a:r>
+            <a:endParaRPr lang="en-US" sz="800" dirty="0"/>
+          </a:p>
+          <a:p>
+            <a:pPr indent="0" marL="0">
+              <a:buNone/>
+            </a:pPr>
+            <a:r>
+              <a:rPr lang="en-US" sz="800" dirty="0">
+                <a:solidFill>
+                  <a:srgbClr val="E6EDF3"/>
+                </a:solidFill>
+                <a:latin typeface="Courier New" pitchFamily="34" charset="0"/>
+                <a:ea typeface="Courier New" pitchFamily="34" charset="-122"/>
+                <a:cs typeface="Courier New" pitchFamily="34" charset="-120"/>
+              </a:rPr>
+              <a:t>    situRootsHoldingMatches(</a:t>
+            </a:r>
+            <a:endParaRPr lang="en-US" sz="800" dirty="0"/>
+          </a:p>
+          <a:p>
+            <a:pPr indent="0" marL="0">
+              <a:buNone/>
+            </a:pPr>
+            <a:r>
+              <a:rPr lang="en-US" sz="800" dirty="0">
+                <a:solidFill>
+                  <a:srgbClr val="E6EDF3"/>
+                </a:solidFill>
+                <a:latin typeface="Courier New" pitchFamily="34" charset="0"/>
+                <a:ea typeface="Courier New" pitchFamily="34" charset="-122"/>
+                <a:cs typeface="Courier New" pitchFamily="34" charset="-120"/>
+              </a:rPr>
+              <a:t>        ws, perRootChanged, r );</a:t>
+            </a:r>
+            <a:endParaRPr lang="en-US" sz="800" dirty="0"/>
+          </a:p>
+          <a:p>
+            <a:pPr indent="0" marL="0">
+              <a:buNone/>
+            </a:pPr>
+            <a:r>
+              <a:rPr lang="en-US" sz="800" dirty="0">
+                <a:solidFill>
+                  <a:srgbClr val="E6EDF3"/>
+                </a:solidFill>
+                <a:latin typeface="Courier New" pitchFamily="34" charset="0"/>
+                <a:ea typeface="Courier New" pitchFamily="34" charset="-122"/>
+                <a:cs typeface="Courier New" pitchFamily="34" charset="-120"/>
+              </a:rPr>
+              <a:t>// … in situRootsHoldingMatches:</a:t>
+            </a:r>
+            <a:endParaRPr lang="en-US" sz="800" dirty="0"/>
+          </a:p>
+          <a:p>
+            <a:pPr indent="0" marL="0">
+              <a:buNone/>
+            </a:pPr>
+            <a:r>
+              <a:rPr lang="en-US" sz="800" dirty="0">
+                <a:solidFill>
+                  <a:srgbClr val="E6EDF3"/>
+                </a:solidFill>
+                <a:latin typeface="Courier New" pitchFamily="34" charset="0"/>
+                <a:ea typeface="Courier New" pitchFamily="34" charset="-122"/>
+                <a:cs typeface="Courier New" pitchFamily="34" charset="-120"/>
+              </a:rPr>
+              <a:t>if( o != self &amp;&amp; std::any_of(</a:t>
+            </a:r>
+            <a:endParaRPr lang="en-US" sz="800" dirty="0"/>
+          </a:p>
+          <a:p>
+            <a:pPr indent="0" marL="0">
+              <a:buNone/>
+            </a:pPr>
+            <a:r>
+              <a:rPr lang="en-US" sz="800" dirty="0">
+                <a:solidFill>
+                  <a:srgbClr val="E6EDF3"/>
+                </a:solidFill>
+                <a:latin typeface="Courier New" pitchFamily="34" charset="0"/>
+                <a:ea typeface="Courier New" pitchFamily="34" charset="-122"/>
+                <a:cs typeface="Courier New" pitchFamily="34" charset="-120"/>
+              </a:rPr>
+              <a:t>    perRootChanged[o].begin(),</a:t>
+            </a:r>
+            <a:endParaRPr lang="en-US" sz="800" dirty="0"/>
+          </a:p>
+          <a:p>
+            <a:pPr indent="0" marL="0">
+              <a:buNone/>
+            </a:pPr>
+            <a:r>
+              <a:rPr lang="en-US" sz="800" dirty="0">
+                <a:solidFill>
+                  <a:srgbClr val="E6EDF3"/>
+                </a:solidFill>
+                <a:latin typeface="Courier New" pitchFamily="34" charset="0"/>
+                <a:ea typeface="Courier New" pitchFamily="34" charset="-122"/>
+                <a:cs typeface="Courier New" pitchFamily="34" charset="-120"/>
+              </a:rPr>
+              <a:t>    perRootChanged[o].end(),</a:t>
+            </a:r>
+            <a:endParaRPr lang="en-US" sz="800" dirty="0"/>
+          </a:p>
+          <a:p>
+            <a:pPr indent="0" marL="0">
+              <a:buNone/>
+            </a:pPr>
+            <a:r>
+              <a:rPr lang="en-US" sz="800" dirty="0">
+                <a:solidFill>
+                  <a:srgbClr val="E6EDF3"/>
+                </a:solidFill>
+                <a:latin typeface="Courier New" pitchFamily="34" charset="0"/>
+                <a:ea typeface="Courier New" pitchFamily="34" charset="-122"/>
+                <a:cs typeface="Courier New" pitchFamily="34" charset="-120"/>
+              </a:rPr>
+              <a:t>    []( char c ) { return c != 0; } ) )</a:t>
+            </a:r>
+            <a:endParaRPr lang="en-US" sz="800" dirty="0"/>
+          </a:p>
+          <a:p>
+            <a:pPr indent="0" marL="0">
+              <a:buNone/>
+            </a:pPr>
+            <a:r>
+              <a:rPr lang="en-US" sz="800" dirty="0">
+                <a:solidFill>
+                  <a:srgbClr val="E6EDF3"/>
+                </a:solidFill>
+                <a:latin typeface="Courier New" pitchFamily="34" charset="0"/>
+                <a:ea typeface="Courier New" pitchFamily="34" charset="-122"/>
+                <a:cs typeface="Courier New" pitchFamily="34" charset="-120"/>
+              </a:rPr>
+              <a:t>{</a:t>
+            </a:r>
+            <a:endParaRPr lang="en-US" sz="800" dirty="0"/>
+          </a:p>
+          <a:p>
+            <a:pPr indent="0" marL="0">
+              <a:buNone/>
+            </a:pPr>
+            <a:r>
+              <a:rPr lang="en-US" sz="800" dirty="0">
+                <a:solidFill>
+                  <a:srgbClr val="E6EDF3"/>
+                </a:solidFill>
+                <a:latin typeface="Courier New" pitchFamily="34" charset="0"/>
+                <a:ea typeface="Courier New" pitchFamily="34" charset="-122"/>
+                <a:cs typeface="Courier New" pitchFamily="34" charset="-120"/>
+              </a:rPr>
+              <a:t>    // … labels += ws[o].label;</a:t>
+            </a:r>
+            <a:endParaRPr lang="en-US" sz="800" dirty="0"/>
+          </a:p>
+        </p:txBody>
+      </p:sp>
+      <p:sp>
+        <p:nvSpPr>
+          <p:cNvPr id="23" name="Text 21"/>
+          <p:cNvSpPr/>
+          <p:nvPr/>
+        </p:nvSpPr>
+        <p:spPr>
+          <a:xfrm>
+            <a:off x="6286500" y="3529584"/>
+            <a:ext cx="5207508" cy="274320"/>
+          </a:xfrm>
+          <a:prstGeom prst="rect">
+            <a:avLst/>
+          </a:prstGeom>
+          <a:noFill/>
+          <a:ln/>
+        </p:spPr>
+        <p:txBody>
+          <a:bodyPr wrap="square" lIns="0" tIns="0" rIns="0" bIns="0" rtlCol="0" anchor="ctr"/>
+          <a:lstStyle/>
+          <a:p>
+            <a:pPr indent="0" marL="0">
+              <a:buNone/>
+            </a:pPr>
+            <a:r>
+              <a:rPr lang="en-US" sz="950" i="1" dirty="0">
+                <a:solidFill>
                   <a:srgbClr val="8B95A5"/>
                 </a:solidFill>
-                <a:latin typeface="Courier New" pitchFamily="34" charset="0"/>
-                <a:ea typeface="Courier New" pitchFamily="34" charset="-122"/>
-                <a:cs typeface="Courier New" pitchFamily="34" charset="-120"/>
-              </a:rPr>
-              <a:t>after</a:t>
-            </a:r>
-            <a:endParaRPr lang="en-US" sz="800" dirty="0"/>
-          </a:p>
-        </p:txBody>
-      </p:sp>
-      <p:sp>
-        <p:nvSpPr>
-          <p:cNvPr id="22" name="Text 20"/>
-          <p:cNvSpPr/>
-          <p:nvPr/>
-        </p:nvSpPr>
-        <p:spPr>
-          <a:xfrm>
-            <a:off x="6222492" y="3803904"/>
-            <a:ext cx="5161788" cy="420624"/>
-          </a:xfrm>
-          <a:prstGeom prst="rect">
-            <a:avLst/>
-          </a:prstGeom>
-          <a:noFill/>
-          <a:ln/>
-        </p:spPr>
-        <p:txBody>
-          <a:bodyPr wrap="square" lIns="0" tIns="0" rIns="0" bIns="0" rtlCol="0" anchor="t"/>
-          <a:lstStyle/>
-          <a:p>
-            <a:pPr indent="0" marL="0">
-              <a:buNone/>
-            </a:pPr>
-            <a:r>
-              <a:rPr lang="en-US" sz="950" dirty="0">
-                <a:solidFill>
-                  <a:srgbClr val="8B95A5"/>
-                </a:solidFill>
-                <a:latin typeface="Courier New" pitchFamily="34" charset="0"/>
-                <a:ea typeface="Courier New" pitchFamily="34" charset="-122"/>
-                <a:cs typeface="Courier New" pitchFamily="34" charset="-120"/>
-              </a:rPr>
-              <a:t>‹after›</a:t>
+                <a:latin typeface="Arial" pitchFamily="34" charset="0"/>
+                <a:ea typeface="Arial" pitchFamily="34" charset="-122"/>
+                <a:cs typeface="Arial" pitchFamily="34" charset="-120"/>
+              </a:rPr>
+              <a:t>The inner loop asked one question; it is now std::any_of, in a named function.</a:t>
             </a:r>
             <a:endParaRPr lang="en-US" sz="950" dirty="0"/>
           </a:p>
@@ -27670,67 +28341,28 @@
       </p:sp>
       <p:sp>
         <p:nvSpPr>
-          <p:cNvPr id="23" name="Text 21"/>
-          <p:cNvSpPr/>
-          <p:nvPr/>
-        </p:nvSpPr>
-        <p:spPr>
-          <a:xfrm>
-            <a:off x="731520" y="4297680"/>
-            <a:ext cx="10725912" cy="292608"/>
-          </a:xfrm>
-          <a:prstGeom prst="rect">
-            <a:avLst/>
-          </a:prstGeom>
-          <a:noFill/>
-          <a:ln/>
-        </p:spPr>
-        <p:txBody>
-          <a:bodyPr wrap="square" lIns="0" tIns="0" rIns="0" bIns="0" rtlCol="0" anchor="ctr"/>
-          <a:lstStyle/>
-          <a:p>
-            <a:pPr indent="0" marL="0">
-              <a:buNone/>
-            </a:pPr>
-            <a:r>
-              <a:rPr lang="en-US" sz="950" i="1" dirty="0">
-                <a:solidFill>
-                  <a:srgbClr val="8B95A5"/>
-                </a:solidFill>
-                <a:latin typeface="Arial" pitchFamily="34" charset="0"/>
-                <a:ea typeface="Arial" pitchFamily="34" charset="-122"/>
-                <a:cs typeface="Arial" pitchFamily="34" charset="-120"/>
-              </a:rPr>
-              <a:t>‹why it matters, in one sentence›</a:t>
-            </a:r>
-            <a:endParaRPr lang="en-US" sz="950" dirty="0"/>
-          </a:p>
-        </p:txBody>
-      </p:sp>
-      <p:sp>
-        <p:nvSpPr>
           <p:cNvPr id="24" name="Shape 22"/>
           <p:cNvSpPr/>
           <p:nvPr/>
         </p:nvSpPr>
         <p:spPr>
           <a:xfrm>
-            <a:off x="566928" y="4773168"/>
-            <a:ext cx="11055096" cy="1463040"/>
+            <a:off x="566928" y="3977640"/>
+            <a:ext cx="5463540" cy="2258568"/>
           </a:xfrm>
           <a:prstGeom prst="roundRect">
             <a:avLst>
-              <a:gd name="adj" fmla="val 5625"/>
+              <a:gd name="adj" fmla="val 3644"/>
             </a:avLst>
           </a:prstGeom>
           <a:solidFill>
             <a:srgbClr val="161D28"/>
           </a:solidFill>
-          <a:ln w="12700">
+          <a:ln w="9525">
             <a:solidFill>
-              <a:srgbClr val="3A4353"/>
+              <a:srgbClr val="232D3D"/>
             </a:solidFill>
-            <a:prstDash val="dash"/>
+            <a:prstDash val="solid"/>
           </a:ln>
         </p:spPr>
       </p:sp>
@@ -27742,8 +28374,8 @@
         </p:nvSpPr>
         <p:spPr>
           <a:xfrm>
-            <a:off x="731520" y="4846320"/>
-            <a:ext cx="2011680" cy="274320"/>
+            <a:off x="694944" y="4032504"/>
+            <a:ext cx="864108" cy="274320"/>
           </a:xfrm>
           <a:prstGeom prst="rect">
             <a:avLst/>
@@ -27761,13 +28393,13 @@
             <a:r>
               <a:rPr lang="en-US" sz="1100" b="1" dirty="0">
                 <a:solidFill>
-                  <a:srgbClr val="8B95A5"/>
-                </a:solidFill>
-                <a:latin typeface="Courier New" pitchFamily="34" charset="0"/>
-                <a:ea typeface="Courier New" pitchFamily="34" charset="-122"/>
-                <a:cs typeface="Courier New" pitchFamily="34" charset="-120"/>
-              </a:rPr>
-              <a:t>‹kind›</a:t>
+                  <a:srgbClr val="F2B84B"/>
+                </a:solidFill>
+                <a:latin typeface="Courier New" pitchFamily="34" charset="0"/>
+                <a:ea typeface="Courier New" pitchFamily="34" charset="-122"/>
+                <a:cs typeface="Courier New" pitchFamily="34" charset="-120"/>
+              </a:rPr>
+              <a:t>dead-code</a:t>
             </a:r>
             <a:endParaRPr lang="en-US" sz="1100" dirty="0"/>
           </a:p>
@@ -27781,34 +28413,34 @@
         </p:nvSpPr>
         <p:spPr>
           <a:xfrm>
-            <a:off x="2807208" y="4846320"/>
-            <a:ext cx="8650224" cy="274320"/>
-          </a:xfrm>
-          <a:prstGeom prst="rect">
-            <a:avLst/>
-          </a:prstGeom>
-          <a:noFill/>
-          <a:ln/>
-        </p:spPr>
-        <p:txBody>
-          <a:bodyPr wrap="square" lIns="0" tIns="0" rIns="0" bIns="0" rtlCol="0" anchor="ctr"/>
-          <a:lstStyle/>
-          <a:p>
-            <a:pPr indent="0" marL="0">
-              <a:buNone/>
-            </a:pPr>
-            <a:r>
-              <a:rPr lang="en-US" sz="1050" dirty="0">
-                <a:solidFill>
-                  <a:srgbClr val="8B95A5"/>
-                </a:solidFill>
-                <a:latin typeface="Arial" pitchFamily="34" charset="0"/>
-                <a:ea typeface="Arial" pitchFamily="34" charset="-122"/>
-                <a:cs typeface="Arial" pitchFamily="34" charset="-120"/>
-              </a:rPr>
-              <a:t>‹the finding, as the tool prints it›</a:t>
-            </a:r>
-            <a:endParaRPr lang="en-US" sz="1050" dirty="0"/>
+            <a:off x="1650492" y="4032504"/>
+            <a:ext cx="4251960" cy="274320"/>
+          </a:xfrm>
+          <a:prstGeom prst="rect">
+            <a:avLst/>
+          </a:prstGeom>
+          <a:noFill/>
+          <a:ln/>
+        </p:spPr>
+        <p:txBody>
+          <a:bodyPr wrap="square" lIns="0" tIns="0" rIns="0" bIns="0" rtlCol="0" anchor="ctr"/>
+          <a:lstStyle/>
+          <a:p>
+            <a:pPr indent="0" marL="0">
+              <a:buNone/>
+            </a:pPr>
+            <a:r>
+              <a:rPr lang="en-US" sz="1000" dirty="0">
+                <a:solidFill>
+                  <a:srgbClr val="E6EDF3"/>
+                </a:solidFill>
+                <a:latin typeface="Arial" pitchFamily="34" charset="0"/>
+                <a:ea typeface="Arial" pitchFamily="34" charset="-122"/>
+                <a:cs typeface="Arial" pitchFamily="34" charset="-120"/>
+              </a:rPr>
+              <a:t>mentionFilesCut · namesUnkeptPackageIndex</a:t>
+            </a:r>
+            <a:endParaRPr lang="en-US" sz="1000" dirty="0"/>
           </a:p>
         </p:txBody>
       </p:sp>
@@ -27820,8 +28452,8 @@
         </p:nvSpPr>
         <p:spPr>
           <a:xfrm>
-            <a:off x="731520" y="5175504"/>
-            <a:ext cx="5308092" cy="676656"/>
+            <a:off x="694944" y="4361688"/>
+            <a:ext cx="2558034" cy="1527048"/>
           </a:xfrm>
           <a:prstGeom prst="rect">
             <a:avLst/>
@@ -27845,17 +28477,56 @@
         </p:nvSpPr>
         <p:spPr>
           <a:xfrm>
-            <a:off x="804672" y="5202936"/>
-            <a:ext cx="5161788" cy="182880"/>
-          </a:xfrm>
-          <a:prstGeom prst="rect">
-            <a:avLst/>
-          </a:prstGeom>
-          <a:noFill/>
-          <a:ln/>
-        </p:spPr>
-        <p:txBody>
-          <a:bodyPr wrap="square" lIns="0" tIns="0" rIns="0" bIns="0" rtlCol="0" anchor="ctr"/>
+            <a:off x="749808" y="4389120"/>
+            <a:ext cx="2448306" cy="155448"/>
+          </a:xfrm>
+          <a:prstGeom prst="rect">
+            <a:avLst/>
+          </a:prstGeom>
+          <a:noFill/>
+          <a:ln/>
+        </p:spPr>
+        <p:txBody>
+          <a:bodyPr wrap="square" lIns="0" tIns="0" rIns="0" bIns="0" rtlCol="0" anchor="ctr"/>
+          <a:lstStyle/>
+          <a:p>
+            <a:pPr indent="0" marL="0">
+              <a:buNone/>
+            </a:pPr>
+            <a:r>
+              <a:rPr lang="en-US" sz="750" dirty="0">
+                <a:solidFill>
+                  <a:srgbClr val="8B95A5"/>
+                </a:solidFill>
+                <a:latin typeface="Courier New" pitchFamily="34" charset="0"/>
+                <a:ea typeface="Courier New" pitchFamily="34" charset="-122"/>
+                <a:cs typeface="Courier New" pitchFamily="34" charset="-120"/>
+              </a:rPr>
+              <a:t>before</a:t>
+            </a:r>
+            <a:endParaRPr lang="en-US" sz="750" dirty="0"/>
+          </a:p>
+        </p:txBody>
+      </p:sp>
+      <p:sp>
+        <p:nvSpPr>
+          <p:cNvPr id="29" name="Text 27"/>
+          <p:cNvSpPr/>
+          <p:nvPr/>
+        </p:nvSpPr>
+        <p:spPr>
+          <a:xfrm>
+            <a:off x="749808" y="4553712"/>
+            <a:ext cx="2448306" cy="1307592"/>
+          </a:xfrm>
+          <a:prstGeom prst="rect">
+            <a:avLst/>
+          </a:prstGeom>
+          <a:noFill/>
+          <a:ln/>
+        </p:spPr>
+        <p:txBody>
+          <a:bodyPr wrap="square" lIns="0" tIns="0" rIns="0" bIns="0" rtlCol="0" anchor="t"/>
           <a:lstStyle/>
           <a:p>
             <a:pPr indent="0" marL="0">
@@ -27864,54 +28535,168 @@
             <a:r>
               <a:rPr lang="en-US" sz="800" dirty="0">
                 <a:solidFill>
-                  <a:srgbClr val="8B95A5"/>
-                </a:solidFill>
-                <a:latin typeface="Courier New" pitchFamily="34" charset="0"/>
-                <a:ea typeface="Courier New" pitchFamily="34" charset="-122"/>
-                <a:cs typeface="Courier New" pitchFamily="34" charset="-120"/>
-              </a:rPr>
-              <a:t>before</a:t>
+                  <a:srgbClr val="E6EDF3"/>
+                </a:solidFill>
+                <a:latin typeface="Courier New" pitchFamily="34" charset="0"/>
+                <a:ea typeface="Courier New" pitchFamily="34" charset="-122"/>
+                <a:cs typeface="Courier New" pitchFamily="34" charset="-120"/>
+              </a:rPr>
+              <a:t>inline bool namesFileNotKept( … )</a:t>
             </a:r>
             <a:endParaRPr lang="en-US" sz="800" dirty="0"/>
           </a:p>
-        </p:txBody>
-      </p:sp>
-      <p:sp>
-        <p:nvSpPr>
-          <p:cNvPr id="29" name="Text 27"/>
-          <p:cNvSpPr/>
-          <p:nvPr/>
-        </p:nvSpPr>
-        <p:spPr>
-          <a:xfrm>
-            <a:off x="804672" y="5394960"/>
-            <a:ext cx="5161788" cy="420624"/>
-          </a:xfrm>
-          <a:prstGeom prst="rect">
-            <a:avLst/>
-          </a:prstGeom>
-          <a:noFill/>
-          <a:ln/>
-        </p:spPr>
-        <p:txBody>
-          <a:bodyPr wrap="square" lIns="0" tIns="0" rIns="0" bIns="0" rtlCol="0" anchor="t"/>
-          <a:lstStyle/>
-          <a:p>
-            <a:pPr indent="0" marL="0">
-              <a:buNone/>
-            </a:pPr>
-            <a:r>
-              <a:rPr lang="en-US" sz="950" dirty="0">
-                <a:solidFill>
-                  <a:srgbClr val="8B95A5"/>
-                </a:solidFill>
-                <a:latin typeface="Courier New" pitchFamily="34" charset="0"/>
-                <a:ea typeface="Courier New" pitchFamily="34" charset="-122"/>
-                <a:cs typeface="Courier New" pitchFamily="34" charset="-120"/>
-              </a:rPr>
-              <a:t>‹before›</a:t>
-            </a:r>
-            <a:endParaRPr lang="en-US" sz="950" dirty="0"/>
+          <a:p>
+            <a:pPr indent="0" marL="0">
+              <a:buNone/>
+            </a:pPr>
+            <a:r>
+              <a:rPr lang="en-US" sz="800" dirty="0">
+                <a:solidFill>
+                  <a:srgbClr val="E6EDF3"/>
+                </a:solidFill>
+                <a:latin typeface="Courier New" pitchFamily="34" charset="0"/>
+                <a:ea typeface="Courier New" pitchFamily="34" charset="-122"/>
+                <a:cs typeface="Courier New" pitchFamily="34" charset="-120"/>
+              </a:rPr>
+              <a:t>{ … return !unkept.empty(); }</a:t>
+            </a:r>
+            <a:endParaRPr lang="en-US" sz="800" dirty="0"/>
+          </a:p>
+          <a:p>
+            <a:pPr indent="0" marL="0">
+              <a:buNone/>
+            </a:pPr>
+            <a:r>
+              <a:rPr lang="en-US" sz="800" dirty="0">
+                <a:solidFill>
+                  <a:srgbClr val="E6EDF3"/>
+                </a:solidFill>
+                <a:latin typeface="Courier New" pitchFamily="34" charset="0"/>
+                <a:ea typeface="Courier New" pitchFamily="34" charset="-122"/>
+                <a:cs typeface="Courier New" pitchFamily="34" charset="-120"/>
+              </a:rPr>
+              <a:t>inline bool mentionFilesCut( … )</a:t>
+            </a:r>
+            <a:endParaRPr lang="en-US" sz="800" dirty="0"/>
+          </a:p>
+          <a:p>
+            <a:pPr indent="0" marL="0">
+              <a:buNone/>
+            </a:pPr>
+            <a:r>
+              <a:rPr lang="en-US" sz="800" dirty="0">
+                <a:solidFill>
+                  <a:srgbClr val="E6EDF3"/>
+                </a:solidFill>
+                <a:latin typeface="Courier New" pitchFamily="34" charset="0"/>
+                <a:ea typeface="Courier New" pitchFamily="34" charset="-122"/>
+                <a:cs typeface="Courier New" pitchFamily="34" charset="-120"/>
+              </a:rPr>
+              <a:t>{</a:t>
+            </a:r>
+            <a:endParaRPr lang="en-US" sz="800" dirty="0"/>
+          </a:p>
+          <a:p>
+            <a:pPr indent="0" marL="0">
+              <a:buNone/>
+            </a:pPr>
+            <a:r>
+              <a:rPr lang="en-US" sz="800" dirty="0">
+                <a:solidFill>
+                  <a:srgbClr val="E6EDF3"/>
+                </a:solidFill>
+                <a:latin typeface="Courier New" pitchFamily="34" charset="0"/>
+                <a:ea typeface="Courier New" pitchFamily="34" charset="-122"/>
+                <a:cs typeface="Courier New" pitchFamily="34" charset="-120"/>
+              </a:rPr>
+              <a:t>    // …</a:t>
+            </a:r>
+            <a:endParaRPr lang="en-US" sz="800" dirty="0"/>
+          </a:p>
+          <a:p>
+            <a:pPr indent="0" marL="0">
+              <a:buNone/>
+            </a:pPr>
+            <a:r>
+              <a:rPr lang="en-US" sz="800" dirty="0">
+                <a:solidFill>
+                  <a:srgbClr val="E6EDF3"/>
+                </a:solidFill>
+                <a:latin typeface="Courier New" pitchFamily="34" charset="0"/>
+                <a:ea typeface="Courier New" pitchFamily="34" charset="-122"/>
+                <a:cs typeface="Courier New" pitchFamily="34" charset="-120"/>
+              </a:rPr>
+              <a:t>    return std::any_of( …, [ &amp; ]( … )</a:t>
+            </a:r>
+            <a:endParaRPr lang="en-US" sz="800" dirty="0"/>
+          </a:p>
+          <a:p>
+            <a:pPr indent="0" marL="0">
+              <a:buNone/>
+            </a:pPr>
+            <a:r>
+              <a:rPr lang="en-US" sz="800" dirty="0">
+                <a:solidFill>
+                  <a:srgbClr val="E6EDF3"/>
+                </a:solidFill>
+                <a:latin typeface="Courier New" pitchFamily="34" charset="0"/>
+                <a:ea typeface="Courier New" pitchFamily="34" charset="-122"/>
+                <a:cs typeface="Courier New" pitchFamily="34" charset="-120"/>
+              </a:rPr>
+              <a:t>    {</a:t>
+            </a:r>
+            <a:endParaRPr lang="en-US" sz="800" dirty="0"/>
+          </a:p>
+          <a:p>
+            <a:pPr indent="0" marL="0">
+              <a:buNone/>
+            </a:pPr>
+            <a:r>
+              <a:rPr lang="en-US" sz="800" dirty="0">
+                <a:solidFill>
+                  <a:srgbClr val="E6EDF3"/>
+                </a:solidFill>
+                <a:latin typeface="Courier New" pitchFamily="34" charset="0"/>
+                <a:ea typeface="Courier New" pitchFamily="34" charset="-122"/>
+                <a:cs typeface="Courier New" pitchFamily="34" charset="-120"/>
+              </a:rPr>
+              <a:t>        return namesFileNotKept( … );</a:t>
+            </a:r>
+            <a:endParaRPr lang="en-US" sz="800" dirty="0"/>
+          </a:p>
+          <a:p>
+            <a:pPr indent="0" marL="0">
+              <a:buNone/>
+            </a:pPr>
+            <a:r>
+              <a:rPr lang="en-US" sz="800" dirty="0">
+                <a:solidFill>
+                  <a:srgbClr val="E6EDF3"/>
+                </a:solidFill>
+                <a:latin typeface="Courier New" pitchFamily="34" charset="0"/>
+                <a:ea typeface="Courier New" pitchFamily="34" charset="-122"/>
+                <a:cs typeface="Courier New" pitchFamily="34" charset="-120"/>
+              </a:rPr>
+              <a:t>    } );</a:t>
+            </a:r>
+            <a:endParaRPr lang="en-US" sz="800" dirty="0"/>
+          </a:p>
+          <a:p>
+            <a:pPr indent="0" marL="0">
+              <a:buNone/>
+            </a:pPr>
+            <a:r>
+              <a:rPr lang="en-US" sz="800" dirty="0">
+                <a:solidFill>
+                  <a:srgbClr val="E6EDF3"/>
+                </a:solidFill>
+                <a:latin typeface="Courier New" pitchFamily="34" charset="0"/>
+                <a:ea typeface="Courier New" pitchFamily="34" charset="-122"/>
+                <a:cs typeface="Courier New" pitchFamily="34" charset="-120"/>
+              </a:rPr>
+              <a:t>}</a:t>
+            </a:r>
+            <a:endParaRPr lang="en-US" sz="800" dirty="0"/>
           </a:p>
         </p:txBody>
       </p:sp>
@@ -27923,8 +28708,8 @@
         </p:nvSpPr>
         <p:spPr>
           <a:xfrm>
-            <a:off x="6149340" y="5175504"/>
-            <a:ext cx="5308092" cy="676656"/>
+            <a:off x="3344418" y="4361688"/>
+            <a:ext cx="2558034" cy="1527048"/>
           </a:xfrm>
           <a:prstGeom prst="rect">
             <a:avLst/>
@@ -27948,17 +28733,56 @@
         </p:nvSpPr>
         <p:spPr>
           <a:xfrm>
-            <a:off x="6222492" y="5202936"/>
-            <a:ext cx="5161788" cy="182880"/>
-          </a:xfrm>
-          <a:prstGeom prst="rect">
-            <a:avLst/>
-          </a:prstGeom>
-          <a:noFill/>
-          <a:ln/>
-        </p:spPr>
-        <p:txBody>
-          <a:bodyPr wrap="square" lIns="0" tIns="0" rIns="0" bIns="0" rtlCol="0" anchor="ctr"/>
+            <a:off x="3399282" y="4389120"/>
+            <a:ext cx="2448306" cy="155448"/>
+          </a:xfrm>
+          <a:prstGeom prst="rect">
+            <a:avLst/>
+          </a:prstGeom>
+          <a:noFill/>
+          <a:ln/>
+        </p:spPr>
+        <p:txBody>
+          <a:bodyPr wrap="square" lIns="0" tIns="0" rIns="0" bIns="0" rtlCol="0" anchor="ctr"/>
+          <a:lstStyle/>
+          <a:p>
+            <a:pPr indent="0" marL="0">
+              <a:buNone/>
+            </a:pPr>
+            <a:r>
+              <a:rPr lang="en-US" sz="750" dirty="0">
+                <a:solidFill>
+                  <a:srgbClr val="8B95A5"/>
+                </a:solidFill>
+                <a:latin typeface="Courier New" pitchFamily="34" charset="0"/>
+                <a:ea typeface="Courier New" pitchFamily="34" charset="-122"/>
+                <a:cs typeface="Courier New" pitchFamily="34" charset="-120"/>
+              </a:rPr>
+              <a:t>after</a:t>
+            </a:r>
+            <a:endParaRPr lang="en-US" sz="750" dirty="0"/>
+          </a:p>
+        </p:txBody>
+      </p:sp>
+      <p:sp>
+        <p:nvSpPr>
+          <p:cNvPr id="32" name="Text 30"/>
+          <p:cNvSpPr/>
+          <p:nvPr/>
+        </p:nvSpPr>
+        <p:spPr>
+          <a:xfrm>
+            <a:off x="3399282" y="4553712"/>
+            <a:ext cx="2448306" cy="1307592"/>
+          </a:xfrm>
+          <a:prstGeom prst="rect">
+            <a:avLst/>
+          </a:prstGeom>
+          <a:noFill/>
+          <a:ln/>
+        </p:spPr>
+        <p:txBody>
+          <a:bodyPr wrap="square" lIns="0" tIns="0" rIns="0" bIns="0" rtlCol="0" anchor="t"/>
           <a:lstStyle/>
           <a:p>
             <a:pPr indent="0" marL="0">
@@ -27967,52 +28791,143 @@
             <a:r>
               <a:rPr lang="en-US" sz="800" dirty="0">
                 <a:solidFill>
+                  <a:srgbClr val="E6EDF3"/>
+                </a:solidFill>
+                <a:latin typeface="Courier New" pitchFamily="34" charset="0"/>
+                <a:ea typeface="Courier New" pitchFamily="34" charset="-122"/>
+                <a:cs typeface="Courier New" pitchFamily="34" charset="-120"/>
+              </a:rPr>
+              <a:t>// all three definitions: deleted</a:t>
+            </a:r>
+            <a:endParaRPr lang="en-US" sz="800" dirty="0"/>
+          </a:p>
+          <a:p>
+            <a:pPr indent="0" marL="0">
+              <a:buNone/>
+            </a:pPr>
+            <a:endParaRPr lang="en-US" sz="800" dirty="0"/>
+          </a:p>
+          <a:p>
+            <a:pPr indent="0" marL="0">
+              <a:buNone/>
+            </a:pPr>
+            <a:r>
+              <a:rPr lang="en-US" sz="800" dirty="0">
+                <a:solidFill>
+                  <a:srgbClr val="E6EDF3"/>
+                </a:solidFill>
+                <a:latin typeface="Courier New" pitchFamily="34" charset="0"/>
+                <a:ea typeface="Courier New" pitchFamily="34" charset="-122"/>
+                <a:cs typeface="Courier New" pitchFamily="34" charset="-120"/>
+              </a:rPr>
+              <a:t>// the live verdict comes from a line</a:t>
+            </a:r>
+            <a:endParaRPr lang="en-US" sz="800" dirty="0"/>
+          </a:p>
+          <a:p>
+            <a:pPr indent="0" marL="0">
+              <a:buNone/>
+            </a:pPr>
+            <a:r>
+              <a:rPr lang="en-US" sz="800" dirty="0">
+                <a:solidFill>
+                  <a:srgbClr val="E6EDF3"/>
+                </a:solidFill>
+                <a:latin typeface="Courier New" pitchFamily="34" charset="0"/>
+                <a:ea typeface="Courier New" pitchFamily="34" charset="-122"/>
+                <a:cs typeface="Courier New" pitchFamily="34" charset="-120"/>
+              </a:rPr>
+              <a:t>// that was already there, unchanged:</a:t>
+            </a:r>
+            <a:endParaRPr lang="en-US" sz="800" dirty="0"/>
+          </a:p>
+          <a:p>
+            <a:pPr indent="0" marL="0">
+              <a:buNone/>
+            </a:pPr>
+            <a:r>
+              <a:rPr lang="en-US" sz="800" dirty="0">
+                <a:solidFill>
+                  <a:srgbClr val="E6EDF3"/>
+                </a:solidFill>
+                <a:latin typeface="Courier New" pitchFamily="34" charset="0"/>
+                <a:ea typeface="Courier New" pitchFamily="34" charset="-122"/>
+                <a:cs typeface="Courier New" pitchFamily="34" charset="-120"/>
+              </a:rPr>
+              <a:t>const std::uint32_t mentionFilesTotal =</a:t>
+            </a:r>
+            <a:endParaRPr lang="en-US" sz="800" dirty="0"/>
+          </a:p>
+          <a:p>
+            <a:pPr indent="0" marL="0">
+              <a:buNone/>
+            </a:pPr>
+            <a:r>
+              <a:rPr lang="en-US" sz="800" dirty="0">
+                <a:solidFill>
+                  <a:srgbClr val="E6EDF3"/>
+                </a:solidFill>
+                <a:latin typeface="Courier New" pitchFamily="34" charset="0"/>
+                <a:ea typeface="Courier New" pitchFamily="34" charset="-122"/>
+                <a:cs typeface="Courier New" pitchFamily="34" charset="-120"/>
+              </a:rPr>
+              <a:t>    mentionFilesNamedTotal(</a:t>
+            </a:r>
+            <a:endParaRPr lang="en-US" sz="800" dirty="0"/>
+          </a:p>
+          <a:p>
+            <a:pPr indent="0" marL="0">
+              <a:buNone/>
+            </a:pPr>
+            <a:r>
+              <a:rPr lang="en-US" sz="800" dirty="0">
+                <a:solidFill>
+                  <a:srgbClr val="E6EDF3"/>
+                </a:solidFill>
+                <a:latin typeface="Courier New" pitchFamily="34" charset="0"/>
+                <a:ea typeface="Courier New" pitchFamily="34" charset="-122"/>
+                <a:cs typeface="Courier New" pitchFamily="34" charset="-120"/>
+              </a:rPr>
+              <a:t>        ing, raw, mentionedFiles );</a:t>
+            </a:r>
+            <a:endParaRPr lang="en-US" sz="800" dirty="0"/>
+          </a:p>
+        </p:txBody>
+      </p:sp>
+      <p:sp>
+        <p:nvSpPr>
+          <p:cNvPr id="33" name="Text 31"/>
+          <p:cNvSpPr/>
+          <p:nvPr/>
+        </p:nvSpPr>
+        <p:spPr>
+          <a:xfrm>
+            <a:off x="694944" y="5916168"/>
+            <a:ext cx="5207508" cy="274320"/>
+          </a:xfrm>
+          <a:prstGeom prst="rect">
+            <a:avLst/>
+          </a:prstGeom>
+          <a:noFill/>
+          <a:ln/>
+        </p:spPr>
+        <p:txBody>
+          <a:bodyPr wrap="square" lIns="0" tIns="0" rIns="0" bIns="0" rtlCol="0" anchor="ctr"/>
+          <a:lstStyle/>
+          <a:p>
+            <a:pPr indent="0" marL="0">
+              <a:buNone/>
+            </a:pPr>
+            <a:r>
+              <a:rPr lang="en-US" sz="950" i="1" dirty="0">
+                <a:solidFill>
                   <a:srgbClr val="8B95A5"/>
                 </a:solidFill>
-                <a:latin typeface="Courier New" pitchFamily="34" charset="0"/>
-                <a:ea typeface="Courier New" pitchFamily="34" charset="-122"/>
-                <a:cs typeface="Courier New" pitchFamily="34" charset="-120"/>
-              </a:rPr>
-              <a:t>after</a:t>
-            </a:r>
-            <a:endParaRPr lang="en-US" sz="800" dirty="0"/>
-          </a:p>
-        </p:txBody>
-      </p:sp>
-      <p:sp>
-        <p:nvSpPr>
-          <p:cNvPr id="32" name="Text 30"/>
-          <p:cNvSpPr/>
-          <p:nvPr/>
-        </p:nvSpPr>
-        <p:spPr>
-          <a:xfrm>
-            <a:off x="6222492" y="5394960"/>
-            <a:ext cx="5161788" cy="420624"/>
-          </a:xfrm>
-          <a:prstGeom prst="rect">
-            <a:avLst/>
-          </a:prstGeom>
-          <a:noFill/>
-          <a:ln/>
-        </p:spPr>
-        <p:txBody>
-          <a:bodyPr wrap="square" lIns="0" tIns="0" rIns="0" bIns="0" rtlCol="0" anchor="t"/>
-          <a:lstStyle/>
-          <a:p>
-            <a:pPr indent="0" marL="0">
-              <a:buNone/>
-            </a:pPr>
-            <a:r>
-              <a:rPr lang="en-US" sz="950" dirty="0">
-                <a:solidFill>
-                  <a:srgbClr val="8B95A5"/>
-                </a:solidFill>
-                <a:latin typeface="Courier New" pitchFamily="34" charset="0"/>
-                <a:ea typeface="Courier New" pitchFamily="34" charset="-122"/>
-                <a:cs typeface="Courier New" pitchFamily="34" charset="-120"/>
-              </a:rPr>
-              <a:t>‹after›</a:t>
+                <a:latin typeface="Arial" pitchFamily="34" charset="0"/>
+                <a:ea typeface="Arial" pitchFamily="34" charset="-122"/>
+                <a:cs typeface="Arial" pitchFamily="34" charset="-120"/>
+              </a:rPr>
+              <a:t>Deleted, not acked. namesFileNotKept had no row: its only caller was dead too.</a:t>
             </a:r>
             <a:endParaRPr lang="en-US" sz="950" dirty="0"/>
           </a:p>
@@ -28020,65 +28935,26 @@
       </p:sp>
       <p:sp>
         <p:nvSpPr>
-          <p:cNvPr id="33" name="Text 31"/>
-          <p:cNvSpPr/>
-          <p:nvPr/>
-        </p:nvSpPr>
-        <p:spPr>
-          <a:xfrm>
-            <a:off x="731520" y="5888736"/>
-            <a:ext cx="10725912" cy="292608"/>
-          </a:xfrm>
-          <a:prstGeom prst="rect">
-            <a:avLst/>
-          </a:prstGeom>
-          <a:noFill/>
-          <a:ln/>
-        </p:spPr>
-        <p:txBody>
-          <a:bodyPr wrap="square" lIns="0" tIns="0" rIns="0" bIns="0" rtlCol="0" anchor="ctr"/>
-          <a:lstStyle/>
-          <a:p>
-            <a:pPr indent="0" marL="0">
-              <a:buNone/>
-            </a:pPr>
-            <a:r>
-              <a:rPr lang="en-US" sz="950" i="1" dirty="0">
-                <a:solidFill>
-                  <a:srgbClr val="8B95A5"/>
-                </a:solidFill>
-                <a:latin typeface="Arial" pitchFamily="34" charset="0"/>
-                <a:ea typeface="Arial" pitchFamily="34" charset="-122"/>
-                <a:cs typeface="Arial" pitchFamily="34" charset="-120"/>
-              </a:rPr>
-              <a:t>‹why it matters, in one sentence›</a:t>
-            </a:r>
-            <a:endParaRPr lang="en-US" sz="950" dirty="0"/>
-          </a:p>
-        </p:txBody>
-      </p:sp>
-      <p:sp>
-        <p:nvSpPr>
           <p:cNvPr id="34" name="Shape 32"/>
           <p:cNvSpPr/>
           <p:nvPr/>
         </p:nvSpPr>
         <p:spPr>
           <a:xfrm>
-            <a:off x="9793224" y="347472"/>
-            <a:ext cx="1828800" cy="329184"/>
+            <a:off x="6158484" y="3977640"/>
+            <a:ext cx="5463540" cy="2258568"/>
           </a:xfrm>
           <a:prstGeom prst="roundRect">
             <a:avLst>
-              <a:gd name="adj" fmla="val 16667"/>
+              <a:gd name="adj" fmla="val 3644"/>
             </a:avLst>
           </a:prstGeom>
           <a:solidFill>
-            <a:srgbClr val="1B2432"/>
+            <a:srgbClr val="161D28"/>
           </a:solidFill>
           <a:ln w="9525">
             <a:solidFill>
-              <a:srgbClr val="F2B84B"/>
+              <a:srgbClr val="232D3D"/>
             </a:solidFill>
             <a:prstDash val="solid"/>
           </a:ln>
@@ -28092,24 +28968,24 @@
         </p:nvSpPr>
         <p:spPr>
           <a:xfrm>
-            <a:off x="9848088" y="347472"/>
-            <a:ext cx="1719072" cy="329184"/>
-          </a:xfrm>
-          <a:prstGeom prst="rect">
-            <a:avLst/>
-          </a:prstGeom>
-          <a:noFill/>
-          <a:ln/>
-        </p:spPr>
-        <p:txBody>
-          <a:bodyPr wrap="square" lIns="508" tIns="508" rIns="508" bIns="508" rtlCol="0" anchor="ctr"/>
-          <a:lstStyle/>
-          <a:p>
-            <a:pPr indent="0" marL="0">
-              <a:buNone/>
-            </a:pPr>
-            <a:r>
-              <a:rPr lang="en-US" sz="1200" dirty="0">
+            <a:off x="6286500" y="4032504"/>
+            <a:ext cx="1031748" cy="274320"/>
+          </a:xfrm>
+          <a:prstGeom prst="rect">
+            <a:avLst/>
+          </a:prstGeom>
+          <a:noFill/>
+          <a:ln/>
+        </p:spPr>
+        <p:txBody>
+          <a:bodyPr wrap="square" lIns="0" tIns="0" rIns="0" bIns="0" rtlCol="0" anchor="ctr"/>
+          <a:lstStyle/>
+          <a:p>
+            <a:pPr indent="0" marL="0">
+              <a:buNone/>
+            </a:pPr>
+            <a:r>
+              <a:rPr lang="en-US" sz="1100" b="1" dirty="0">
                 <a:solidFill>
                   <a:srgbClr val="F2B84B"/>
                 </a:solidFill>
@@ -28117,15 +28993,605 @@
                 <a:ea typeface="Courier New" pitchFamily="34" charset="-122"/>
                 <a:cs typeface="Courier New" pitchFamily="34" charset="-120"/>
               </a:rPr>
-              <a:t>PLACEHOLDER</a:t>
-            </a:r>
-            <a:endParaRPr lang="en-US" sz="1200" dirty="0"/>
+              <a:t>duplication</a:t>
+            </a:r>
+            <a:endParaRPr lang="en-US" sz="1100" dirty="0"/>
           </a:p>
         </p:txBody>
       </p:sp>
       <p:sp>
         <p:nvSpPr>
           <p:cNvPr id="36" name="Text 34"/>
+          <p:cNvSpPr/>
+          <p:nvPr/>
+        </p:nvSpPr>
+        <p:spPr>
+          <a:xfrm>
+            <a:off x="7409688" y="4032504"/>
+            <a:ext cx="4084320" cy="274320"/>
+          </a:xfrm>
+          <a:prstGeom prst="rect">
+            <a:avLst/>
+          </a:prstGeom>
+          <a:noFill/>
+          <a:ln/>
+        </p:spPr>
+        <p:txBody>
+          <a:bodyPr wrap="square" lIns="0" tIns="0" rIns="0" bIns="0" rtlCol="0" anchor="ctr"/>
+          <a:lstStyle/>
+          <a:p>
+            <a:pPr indent="0" marL="0">
+              <a:buNone/>
+            </a:pPr>
+            <a:r>
+              <a:rPr lang="en-US" sz="1000" dirty="0">
+                <a:solidFill>
+                  <a:srgbClr val="E6EDF3"/>
+                </a:solidFill>
+                <a:latin typeface="Arial" pitchFamily="34" charset="0"/>
+                <a:ea typeface="Arial" pitchFamily="34" charset="-122"/>
+                <a:cs typeface="Arial" pitchFamily="34" charset="-120"/>
+              </a:rPr>
+              <a:t>withHeaderAttrAfter | withHeaderField  tokens="122"</a:t>
+            </a:r>
+            <a:endParaRPr lang="en-US" sz="1000" dirty="0"/>
+          </a:p>
+        </p:txBody>
+      </p:sp>
+      <p:sp>
+        <p:nvSpPr>
+          <p:cNvPr id="37" name="Shape 35"/>
+          <p:cNvSpPr/>
+          <p:nvPr/>
+        </p:nvSpPr>
+        <p:spPr>
+          <a:xfrm>
+            <a:off x="6286500" y="4361688"/>
+            <a:ext cx="2558034" cy="1527048"/>
+          </a:xfrm>
+          <a:prstGeom prst="rect">
+            <a:avLst/>
+          </a:prstGeom>
+          <a:solidFill>
+            <a:srgbClr val="0D1117"/>
+          </a:solidFill>
+          <a:ln w="6350">
+            <a:solidFill>
+              <a:srgbClr val="232D3D"/>
+            </a:solidFill>
+            <a:prstDash val="solid"/>
+          </a:ln>
+        </p:spPr>
+      </p:sp>
+      <p:sp>
+        <p:nvSpPr>
+          <p:cNvPr id="38" name="Text 36"/>
+          <p:cNvSpPr/>
+          <p:nvPr/>
+        </p:nvSpPr>
+        <p:spPr>
+          <a:xfrm>
+            <a:off x="6341364" y="4389120"/>
+            <a:ext cx="2448306" cy="155448"/>
+          </a:xfrm>
+          <a:prstGeom prst="rect">
+            <a:avLst/>
+          </a:prstGeom>
+          <a:noFill/>
+          <a:ln/>
+        </p:spPr>
+        <p:txBody>
+          <a:bodyPr wrap="square" lIns="0" tIns="0" rIns="0" bIns="0" rtlCol="0" anchor="ctr"/>
+          <a:lstStyle/>
+          <a:p>
+            <a:pPr indent="0" marL="0">
+              <a:buNone/>
+            </a:pPr>
+            <a:r>
+              <a:rPr lang="en-US" sz="750" dirty="0">
+                <a:solidFill>
+                  <a:srgbClr val="8B95A5"/>
+                </a:solidFill>
+                <a:latin typeface="Courier New" pitchFamily="34" charset="0"/>
+                <a:ea typeface="Courier New" pitchFamily="34" charset="-122"/>
+                <a:cs typeface="Courier New" pitchFamily="34" charset="-120"/>
+              </a:rPr>
+              <a:t>before</a:t>
+            </a:r>
+            <a:endParaRPr lang="en-US" sz="750" dirty="0"/>
+          </a:p>
+        </p:txBody>
+      </p:sp>
+      <p:sp>
+        <p:nvSpPr>
+          <p:cNvPr id="39" name="Text 37"/>
+          <p:cNvSpPr/>
+          <p:nvPr/>
+        </p:nvSpPr>
+        <p:spPr>
+          <a:xfrm>
+            <a:off x="6341364" y="4553712"/>
+            <a:ext cx="2448306" cy="1307592"/>
+          </a:xfrm>
+          <a:prstGeom prst="rect">
+            <a:avLst/>
+          </a:prstGeom>
+          <a:noFill/>
+          <a:ln/>
+        </p:spPr>
+        <p:txBody>
+          <a:bodyPr wrap="square" lIns="0" tIns="0" rIns="0" bIns="0" rtlCol="0" anchor="t"/>
+          <a:lstStyle/>
+          <a:p>
+            <a:pPr indent="0" marL="0">
+              <a:buNone/>
+            </a:pPr>
+            <a:r>
+              <a:rPr lang="en-US" sz="800" dirty="0">
+                <a:solidFill>
+                  <a:srgbClr val="E6EDF3"/>
+                </a:solidFill>
+                <a:latin typeface="Courier New" pitchFamily="34" charset="0"/>
+                <a:ea typeface="Courier New" pitchFamily="34" charset="-122"/>
+                <a:cs typeface="Courier New" pitchFamily="34" charset="-120"/>
+              </a:rPr>
+              <a:t>const std::size_t pos =</a:t>
+            </a:r>
+            <a:endParaRPr lang="en-US" sz="800" dirty="0"/>
+          </a:p>
+          <a:p>
+            <a:pPr indent="0" marL="0">
+              <a:buNone/>
+            </a:pPr>
+            <a:r>
+              <a:rPr lang="en-US" sz="800" dirty="0">
+                <a:solidFill>
+                  <a:srgbClr val="E6EDF3"/>
+                </a:solidFill>
+                <a:latin typeface="Courier New" pitchFamily="34" charset="0"/>
+                <a:ea typeface="Courier New" pitchFamily="34" charset="-122"/>
+                <a:cs typeface="Courier New" pitchFamily="34" charset="-120"/>
+              </a:rPr>
+              <a:t>    line.find( afterField );</a:t>
+            </a:r>
+            <a:endParaRPr lang="en-US" sz="800" dirty="0"/>
+          </a:p>
+          <a:p>
+            <a:pPr indent="0" marL="0">
+              <a:buNone/>
+            </a:pPr>
+            <a:r>
+              <a:rPr lang="en-US" sz="800" dirty="0">
+                <a:solidFill>
+                  <a:srgbClr val="E6EDF3"/>
+                </a:solidFill>
+                <a:latin typeface="Courier New" pitchFamily="34" charset="0"/>
+                <a:ea typeface="Courier New" pitchFamily="34" charset="-122"/>
+                <a:cs typeface="Courier New" pitchFamily="34" charset="-120"/>
+              </a:rPr>
+              <a:t>// …</a:t>
+            </a:r>
+            <a:endParaRPr lang="en-US" sz="800" dirty="0"/>
+          </a:p>
+          <a:p>
+            <a:pPr indent="0" marL="0">
+              <a:buNone/>
+            </a:pPr>
+            <a:r>
+              <a:rPr lang="en-US" sz="800" dirty="0">
+                <a:solidFill>
+                  <a:srgbClr val="E6EDF3"/>
+                </a:solidFill>
+                <a:latin typeface="Courier New" pitchFamily="34" charset="0"/>
+                <a:ea typeface="Courier New" pitchFamily="34" charset="-122"/>
+                <a:cs typeface="Courier New" pitchFamily="34" charset="-120"/>
+              </a:rPr>
+              <a:t>std::size_t at =</a:t>
+            </a:r>
+            <a:endParaRPr lang="en-US" sz="800" dirty="0"/>
+          </a:p>
+          <a:p>
+            <a:pPr indent="0" marL="0">
+              <a:buNone/>
+            </a:pPr>
+            <a:r>
+              <a:rPr lang="en-US" sz="800" dirty="0">
+                <a:solidFill>
+                  <a:srgbClr val="E6EDF3"/>
+                </a:solidFill>
+                <a:latin typeface="Courier New" pitchFamily="34" charset="0"/>
+                <a:ea typeface="Courier New" pitchFamily="34" charset="-122"/>
+                <a:cs typeface="Courier New" pitchFamily="34" charset="-120"/>
+              </a:rPr>
+              <a:t>    pos + afterField.size();</a:t>
+            </a:r>
+            <a:endParaRPr lang="en-US" sz="800" dirty="0"/>
+          </a:p>
+          <a:p>
+            <a:pPr indent="0" marL="0">
+              <a:buNone/>
+            </a:pPr>
+            <a:r>
+              <a:rPr lang="en-US" sz="800" dirty="0">
+                <a:solidFill>
+                  <a:srgbClr val="E6EDF3"/>
+                </a:solidFill>
+                <a:latin typeface="Courier New" pitchFamily="34" charset="0"/>
+                <a:ea typeface="Courier New" pitchFamily="34" charset="-122"/>
+                <a:cs typeface="Courier New" pitchFamily="34" charset="-120"/>
+              </a:rPr>
+              <a:t>while( at &lt; line.size()</a:t>
+            </a:r>
+            <a:endParaRPr lang="en-US" sz="800" dirty="0"/>
+          </a:p>
+          <a:p>
+            <a:pPr indent="0" marL="0">
+              <a:buNone/>
+            </a:pPr>
+            <a:r>
+              <a:rPr lang="en-US" sz="800" dirty="0">
+                <a:solidFill>
+                  <a:srgbClr val="E6EDF3"/>
+                </a:solidFill>
+                <a:latin typeface="Courier New" pitchFamily="34" charset="0"/>
+                <a:ea typeface="Courier New" pitchFamily="34" charset="-122"/>
+                <a:cs typeface="Courier New" pitchFamily="34" charset="-120"/>
+              </a:rPr>
+              <a:t>       &amp;&amp; line[ at ] &gt;= '0'</a:t>
+            </a:r>
+            <a:endParaRPr lang="en-US" sz="800" dirty="0"/>
+          </a:p>
+          <a:p>
+            <a:pPr indent="0" marL="0">
+              <a:buNone/>
+            </a:pPr>
+            <a:r>
+              <a:rPr lang="en-US" sz="800" dirty="0">
+                <a:solidFill>
+                  <a:srgbClr val="E6EDF3"/>
+                </a:solidFill>
+                <a:latin typeface="Courier New" pitchFamily="34" charset="0"/>
+                <a:ea typeface="Courier New" pitchFamily="34" charset="-122"/>
+                <a:cs typeface="Courier New" pitchFamily="34" charset="-120"/>
+              </a:rPr>
+              <a:t>       &amp;&amp; line[ at ] &lt;= '9' )</a:t>
+            </a:r>
+            <a:endParaRPr lang="en-US" sz="800" dirty="0"/>
+          </a:p>
+          <a:p>
+            <a:pPr indent="0" marL="0">
+              <a:buNone/>
+            </a:pPr>
+            <a:r>
+              <a:rPr lang="en-US" sz="800" dirty="0">
+                <a:solidFill>
+                  <a:srgbClr val="E6EDF3"/>
+                </a:solidFill>
+                <a:latin typeface="Courier New" pitchFamily="34" charset="0"/>
+                <a:ea typeface="Courier New" pitchFamily="34" charset="-122"/>
+                <a:cs typeface="Courier New" pitchFamily="34" charset="-120"/>
+              </a:rPr>
+              <a:t>{ ++at; }</a:t>
+            </a:r>
+            <a:endParaRPr lang="en-US" sz="800" dirty="0"/>
+          </a:p>
+          <a:p>
+            <a:pPr indent="0" marL="0">
+              <a:buNone/>
+            </a:pPr>
+            <a:r>
+              <a:rPr lang="en-US" sz="800" dirty="0">
+                <a:solidFill>
+                  <a:srgbClr val="E6EDF3"/>
+                </a:solidFill>
+                <a:latin typeface="Courier New" pitchFamily="34" charset="0"/>
+                <a:ea typeface="Courier New" pitchFamily="34" charset="-122"/>
+                <a:cs typeface="Courier New" pitchFamily="34" charset="-120"/>
+              </a:rPr>
+              <a:t>line.insert( at, attr );</a:t>
+            </a:r>
+            <a:endParaRPr lang="en-US" sz="800" dirty="0"/>
+          </a:p>
+        </p:txBody>
+      </p:sp>
+      <p:sp>
+        <p:nvSpPr>
+          <p:cNvPr id="40" name="Shape 38"/>
+          <p:cNvSpPr/>
+          <p:nvPr/>
+        </p:nvSpPr>
+        <p:spPr>
+          <a:xfrm>
+            <a:off x="8935974" y="4361688"/>
+            <a:ext cx="2558034" cy="1527048"/>
+          </a:xfrm>
+          <a:prstGeom prst="rect">
+            <a:avLst/>
+          </a:prstGeom>
+          <a:solidFill>
+            <a:srgbClr val="0D1117"/>
+          </a:solidFill>
+          <a:ln w="6350">
+            <a:solidFill>
+              <a:srgbClr val="232D3D"/>
+            </a:solidFill>
+            <a:prstDash val="solid"/>
+          </a:ln>
+        </p:spPr>
+      </p:sp>
+      <p:sp>
+        <p:nvSpPr>
+          <p:cNvPr id="41" name="Text 39"/>
+          <p:cNvSpPr/>
+          <p:nvPr/>
+        </p:nvSpPr>
+        <p:spPr>
+          <a:xfrm>
+            <a:off x="8990838" y="4389120"/>
+            <a:ext cx="2448306" cy="155448"/>
+          </a:xfrm>
+          <a:prstGeom prst="rect">
+            <a:avLst/>
+          </a:prstGeom>
+          <a:noFill/>
+          <a:ln/>
+        </p:spPr>
+        <p:txBody>
+          <a:bodyPr wrap="square" lIns="0" tIns="0" rIns="0" bIns="0" rtlCol="0" anchor="ctr"/>
+          <a:lstStyle/>
+          <a:p>
+            <a:pPr indent="0" marL="0">
+              <a:buNone/>
+            </a:pPr>
+            <a:r>
+              <a:rPr lang="en-US" sz="750" dirty="0">
+                <a:solidFill>
+                  <a:srgbClr val="8B95A5"/>
+                </a:solidFill>
+                <a:latin typeface="Courier New" pitchFamily="34" charset="0"/>
+                <a:ea typeface="Courier New" pitchFamily="34" charset="-122"/>
+                <a:cs typeface="Courier New" pitchFamily="34" charset="-120"/>
+              </a:rPr>
+              <a:t>after</a:t>
+            </a:r>
+            <a:endParaRPr lang="en-US" sz="750" dirty="0"/>
+          </a:p>
+        </p:txBody>
+      </p:sp>
+      <p:sp>
+        <p:nvSpPr>
+          <p:cNvPr id="42" name="Text 40"/>
+          <p:cNvSpPr/>
+          <p:nvPr/>
+        </p:nvSpPr>
+        <p:spPr>
+          <a:xfrm>
+            <a:off x="8990838" y="4553712"/>
+            <a:ext cx="2448306" cy="1307592"/>
+          </a:xfrm>
+          <a:prstGeom prst="rect">
+            <a:avLst/>
+          </a:prstGeom>
+          <a:noFill/>
+          <a:ln/>
+        </p:spPr>
+        <p:txBody>
+          <a:bodyPr wrap="square" lIns="0" tIns="0" rIns="0" bIns="0" rtlCol="0" anchor="t"/>
+          <a:lstStyle/>
+          <a:p>
+            <a:pPr indent="0" marL="0">
+              <a:buNone/>
+            </a:pPr>
+            <a:r>
+              <a:rPr lang="en-US" sz="800" dirty="0">
+                <a:solidFill>
+                  <a:srgbClr val="E6EDF3"/>
+                </a:solidFill>
+                <a:latin typeface="Courier New" pitchFamily="34" charset="0"/>
+                <a:ea typeface="Courier New" pitchFamily="34" charset="-122"/>
+                <a:cs typeface="Courier New" pitchFamily="34" charset="-120"/>
+              </a:rPr>
+              <a:t>std::pair&lt;std::size_t, std::size_t&gt;</a:t>
+            </a:r>
+            <a:endParaRPr lang="en-US" sz="800" dirty="0"/>
+          </a:p>
+          <a:p>
+            <a:pPr indent="0" marL="0">
+              <a:buNone/>
+            </a:pPr>
+            <a:r>
+              <a:rPr lang="en-US" sz="800" dirty="0">
+                <a:solidFill>
+                  <a:srgbClr val="E6EDF3"/>
+                </a:solidFill>
+                <a:latin typeface="Courier New" pitchFamily="34" charset="0"/>
+                <a:ea typeface="Courier New" pitchFamily="34" charset="-122"/>
+                <a:cs typeface="Courier New" pitchFamily="34" charset="-120"/>
+              </a:rPr>
+              <a:t>headerFieldDigits( … line, … field )</a:t>
+            </a:r>
+            <a:endParaRPr lang="en-US" sz="800" dirty="0"/>
+          </a:p>
+          <a:p>
+            <a:pPr indent="0" marL="0">
+              <a:buNone/>
+            </a:pPr>
+            <a:r>
+              <a:rPr lang="en-US" sz="800" dirty="0">
+                <a:solidFill>
+                  <a:srgbClr val="E6EDF3"/>
+                </a:solidFill>
+                <a:latin typeface="Courier New" pitchFamily="34" charset="0"/>
+                <a:ea typeface="Courier New" pitchFamily="34" charset="-122"/>
+                <a:cs typeface="Courier New" pitchFamily="34" charset="-120"/>
+              </a:rPr>
+              <a:t>// … find it, walk its digit run</a:t>
+            </a:r>
+            <a:endParaRPr lang="en-US" sz="800" dirty="0"/>
+          </a:p>
+          <a:p>
+            <a:pPr indent="0" marL="0">
+              <a:buNone/>
+            </a:pPr>
+            <a:r>
+              <a:rPr lang="en-US" sz="800" dirty="0">
+                <a:solidFill>
+                  <a:srgbClr val="E6EDF3"/>
+                </a:solidFill>
+                <a:latin typeface="Courier New" pitchFamily="34" charset="0"/>
+                <a:ea typeface="Courier New" pitchFamily="34" charset="-122"/>
+                <a:cs typeface="Courier New" pitchFamily="34" charset="-120"/>
+              </a:rPr>
+              <a:t>// withHeaderAttrAfter( … ):</a:t>
+            </a:r>
+            <a:endParaRPr lang="en-US" sz="800" dirty="0"/>
+          </a:p>
+          <a:p>
+            <a:pPr indent="0" marL="0">
+              <a:buNone/>
+            </a:pPr>
+            <a:r>
+              <a:rPr lang="en-US" sz="800" dirty="0">
+                <a:solidFill>
+                  <a:srgbClr val="E6EDF3"/>
+                </a:solidFill>
+                <a:latin typeface="Courier New" pitchFamily="34" charset="0"/>
+                <a:ea typeface="Courier New" pitchFamily="34" charset="-122"/>
+                <a:cs typeface="Courier New" pitchFamily="34" charset="-120"/>
+              </a:rPr>
+              <a:t>const auto [ start, end ] =</a:t>
+            </a:r>
+            <a:endParaRPr lang="en-US" sz="800" dirty="0"/>
+          </a:p>
+          <a:p>
+            <a:pPr indent="0" marL="0">
+              <a:buNone/>
+            </a:pPr>
+            <a:r>
+              <a:rPr lang="en-US" sz="800" dirty="0">
+                <a:solidFill>
+                  <a:srgbClr val="E6EDF3"/>
+                </a:solidFill>
+                <a:latin typeface="Courier New" pitchFamily="34" charset="0"/>
+                <a:ea typeface="Courier New" pitchFamily="34" charset="-122"/>
+                <a:cs typeface="Courier New" pitchFamily="34" charset="-120"/>
+              </a:rPr>
+              <a:t>    headerFieldDigits(</a:t>
+            </a:r>
+            <a:endParaRPr lang="en-US" sz="800" dirty="0"/>
+          </a:p>
+          <a:p>
+            <a:pPr indent="0" marL="0">
+              <a:buNone/>
+            </a:pPr>
+            <a:r>
+              <a:rPr lang="en-US" sz="800" dirty="0">
+                <a:solidFill>
+                  <a:srgbClr val="E6EDF3"/>
+                </a:solidFill>
+                <a:latin typeface="Courier New" pitchFamily="34" charset="0"/>
+                <a:ea typeface="Courier New" pitchFamily="34" charset="-122"/>
+                <a:cs typeface="Courier New" pitchFamily="34" charset="-120"/>
+              </a:rPr>
+              <a:t>        line, afterField );</a:t>
+            </a:r>
+            <a:endParaRPr lang="en-US" sz="800" dirty="0"/>
+          </a:p>
+          <a:p>
+            <a:pPr indent="0" marL="0">
+              <a:buNone/>
+            </a:pPr>
+            <a:r>
+              <a:rPr lang="en-US" sz="800" dirty="0">
+                <a:solidFill>
+                  <a:srgbClr val="E6EDF3"/>
+                </a:solidFill>
+                <a:latin typeface="Courier New" pitchFamily="34" charset="0"/>
+                <a:ea typeface="Courier New" pitchFamily="34" charset="-122"/>
+                <a:cs typeface="Courier New" pitchFamily="34" charset="-120"/>
+              </a:rPr>
+              <a:t>if( start != std::string::npos )</a:t>
+            </a:r>
+            <a:endParaRPr lang="en-US" sz="800" dirty="0"/>
+          </a:p>
+          <a:p>
+            <a:pPr indent="0" marL="0">
+              <a:buNone/>
+            </a:pPr>
+            <a:r>
+              <a:rPr lang="en-US" sz="800" dirty="0">
+                <a:solidFill>
+                  <a:srgbClr val="E6EDF3"/>
+                </a:solidFill>
+                <a:latin typeface="Courier New" pitchFamily="34" charset="0"/>
+                <a:ea typeface="Courier New" pitchFamily="34" charset="-122"/>
+                <a:cs typeface="Courier New" pitchFamily="34" charset="-120"/>
+              </a:rPr>
+              <a:t>{</a:t>
+            </a:r>
+            <a:endParaRPr lang="en-US" sz="800" dirty="0"/>
+          </a:p>
+          <a:p>
+            <a:pPr indent="0" marL="0">
+              <a:buNone/>
+            </a:pPr>
+            <a:r>
+              <a:rPr lang="en-US" sz="800" dirty="0">
+                <a:solidFill>
+                  <a:srgbClr val="E6EDF3"/>
+                </a:solidFill>
+                <a:latin typeface="Courier New" pitchFamily="34" charset="0"/>
+                <a:ea typeface="Courier New" pitchFamily="34" charset="-122"/>
+                <a:cs typeface="Courier New" pitchFamily="34" charset="-120"/>
+              </a:rPr>
+              <a:t>    line.insert( end, attr );</a:t>
+            </a:r>
+            <a:endParaRPr lang="en-US" sz="800" dirty="0"/>
+          </a:p>
+        </p:txBody>
+      </p:sp>
+      <p:sp>
+        <p:nvSpPr>
+          <p:cNvPr id="43" name="Text 41"/>
+          <p:cNvSpPr/>
+          <p:nvPr/>
+        </p:nvSpPr>
+        <p:spPr>
+          <a:xfrm>
+            <a:off x="6286500" y="5916168"/>
+            <a:ext cx="5207508" cy="274320"/>
+          </a:xfrm>
+          <a:prstGeom prst="rect">
+            <a:avLst/>
+          </a:prstGeom>
+          <a:noFill/>
+          <a:ln/>
+        </p:spPr>
+        <p:txBody>
+          <a:bodyPr wrap="square" lIns="0" tIns="0" rIns="0" bIns="0" rtlCol="0" anchor="ctr"/>
+          <a:lstStyle/>
+          <a:p>
+            <a:pPr indent="0" marL="0">
+              <a:buNone/>
+            </a:pPr>
+            <a:r>
+              <a:rPr lang="en-US" sz="950" i="1" dirty="0">
+                <a:solidFill>
+                  <a:srgbClr val="8B95A5"/>
+                </a:solidFill>
+                <a:latin typeface="Arial" pitchFamily="34" charset="0"/>
+                <a:ea typeface="Arial" pitchFamily="34" charset="-122"/>
+                <a:cs typeface="Arial" pitchFamily="34" charset="-120"/>
+              </a:rPr>
+              <a:t>The locator is shared now, yet a 63-token residue still gates: a false positive.</a:t>
+            </a:r>
+            <a:endParaRPr lang="en-US" sz="950" dirty="0"/>
+          </a:p>
+        </p:txBody>
+      </p:sp>
+      <p:sp>
+        <p:nvSpPr>
+          <p:cNvPr id="44" name="Text 42"/>
           <p:cNvSpPr/>
           <p:nvPr/>
         </p:nvSpPr>
@@ -28156,7 +29622,7 @@
                 <a:ea typeface="Courier New" pitchFamily="34" charset="-122"/>
                 <a:cs typeface="Courier New" pitchFamily="34" charset="-120"/>
               </a:rPr>
-              <a:t>placeholder: the examples arrive as data (QD_EXAMPLES, top of the generator) once docs/QUALITY_DELTA_CATALOG.md lands</a:t>
+              <a:t>each pair is copied from docs/QUALITY_DELTA_CATALOG.md, where the command that reproduces it is recorded</a:t>
             </a:r>
             <a:endParaRPr lang="en-US" sz="1050" dirty="0"/>
           </a:p>

--- a/present/ripwire-showcase.pptx
+++ b/present/ripwire-showcase.pptx
@@ -5167,24 +5167,24 @@
         </p:nvSpPr>
         <p:spPr>
           <a:xfrm>
-            <a:off x="566928" y="384048"/>
-            <a:ext cx="8229600" cy="292608"/>
-          </a:xfrm>
-          <a:prstGeom prst="rect">
-            <a:avLst/>
-          </a:prstGeom>
-          <a:noFill/>
-          <a:ln/>
-        </p:spPr>
-        <p:txBody>
-          <a:bodyPr wrap="square" lIns="0" tIns="0" rIns="0" bIns="0" rtlCol="0" anchor="ctr"/>
-          <a:lstStyle/>
-          <a:p>
-            <a:pPr indent="0" marL="0">
-              <a:buNone/>
-            </a:pPr>
-            <a:r>
-              <a:rPr lang="en-US" sz="1300" dirty="0">
+            <a:off x="566928" y="310896"/>
+            <a:ext cx="11055096" cy="384048"/>
+          </a:xfrm>
+          <a:prstGeom prst="rect">
+            <a:avLst/>
+          </a:prstGeom>
+          <a:noFill/>
+          <a:ln/>
+        </p:spPr>
+        <p:txBody>
+          <a:bodyPr wrap="square" lIns="0" tIns="0" rIns="0" bIns="0" rtlCol="0" anchor="ctr"/>
+          <a:lstStyle/>
+          <a:p>
+            <a:pPr indent="0" marL="0">
+              <a:buNone/>
+            </a:pPr>
+            <a:r>
+              <a:rPr lang="en-US" sz="1800" dirty="0">
                 <a:solidFill>
                   <a:srgbClr val="56D6E8"/>
                 </a:solidFill>
@@ -5192,9 +5192,37 @@
                 <a:ea typeface="Courier New" pitchFamily="34" charset="-122"/>
                 <a:cs typeface="Courier New" pitchFamily="34" charset="-120"/>
               </a:rPr>
-              <a:t>// Rip'n Fast, at scale — llvm-project, 182,555 files, as the instrument</a:t>
-            </a:r>
-            <a:endParaRPr lang="en-US" sz="1300" dirty="0"/>
+              <a:t>// Rip'n Fast, at scale — llvm-project, </a:t>
+            </a:r>
+            <a:pPr indent="0" marL="0">
+              <a:buNone/>
+            </a:pPr>
+            <a:r>
+              <a:rPr lang="en-US" sz="1800" b="1" dirty="0">
+                <a:solidFill>
+                  <a:srgbClr val="56D6E8"/>
+                </a:solidFill>
+                <a:latin typeface="Courier New" pitchFamily="34" charset="0"/>
+                <a:ea typeface="Courier New" pitchFamily="34" charset="-122"/>
+                <a:cs typeface="Courier New" pitchFamily="34" charset="-120"/>
+              </a:rPr>
+              <a:t>182,555</a:t>
+            </a:r>
+            <a:pPr indent="0" marL="0">
+              <a:buNone/>
+            </a:pPr>
+            <a:r>
+              <a:rPr lang="en-US" sz="1800" dirty="0">
+                <a:solidFill>
+                  <a:srgbClr val="56D6E8"/>
+                </a:solidFill>
+                <a:latin typeface="Courier New" pitchFamily="34" charset="0"/>
+                <a:ea typeface="Courier New" pitchFamily="34" charset="-122"/>
+                <a:cs typeface="Courier New" pitchFamily="34" charset="-120"/>
+              </a:rPr>
+              <a:t> files, as the instrument</a:t>
+            </a:r>
+            <a:endParaRPr lang="en-US" sz="1800" dirty="0"/>
           </a:p>
         </p:txBody>
       </p:sp>

--- a/present/ripwire-showcase.pptx
+++ b/present/ripwire-showcase.pptx
@@ -1166,7 +1166,7 @@
             <a:r>
               <a:rPr lang="en-US" dirty="0"/>
               <a:t>SOURCES (cover)
-- "24 vendored tree-sitter grammars" — pending merge: #126, which vendors the Kotlin grammar (PR #126 body: "vendored fwcd/tree-sitter-kotlin grammar"). Without #126 the count is 23.
+- "24 vendored tree-sitter grammars" — merged: #126 (merge commit 1ad9184a, 2026-09-11), which vendors the Kotlin grammar (PR #126 body: "vendored fwcd/tree-sitter-kotlin grammar"). Before #126 the count was 23. On main 40a1895b: README.md, "24 vendored grammars", and third_party/deps/ holds a kotlin/ directory.
 - The 23 it builds on: commit 680a0a3d,"It is 23: 22 upstream projects under third_party/deps/, with tree-sitter-typescript supplying both typescript and tsx"; PR #106's title, "Dart: a 23rd grammar …"; README.md, "23 vendored grammars".
 - The wave under "The ripgrep of AI context.": present/assets/paddle-out.png, rendered from docs/assets/paddle-out.svg (commit 680a0a3d; PR #133 moved the wave from the README hero to this deck).</a:t>
             </a:r>
@@ -1479,26 +1479,28 @@
           <a:p>
             <a:r>
               <a:rPr lang="en-US" dirty="0"/>
-              <a:t>PENDING MERGE: #135, #136, #126. This whole slide comes from its own commit. Keep it only once all three PRs have landed (or drop the card whose PR missed the release), and re-check every figure below against the merged PR.
-ONE MISSING SEMICOLON — pending merge: #135 (PR body):
+              <a:t>SOURCES (three more stories — all merged). #136 merge commit d752d953, #135 merge commit 1187b7f3, #126 merge commit 1ad9184a, all 2026-09-11 and all ancestors of main 40a1895b.
+ONE MISSING SEMICOLON — merged: #135, merge commit 1187b7f3 (PR body):
 - “A function-like macro invoked without ; as the last member of a class or struct (EXC_NAME(Foo) right before };) sends tree-sitter-cpp's error recovery off course.” “The same shape derails tree-sitter-c and tree-sitter-objc.”
 - “On memgraph, one file had 472 of 487 definitions misfiled”; “A 14-line function (PrintFuncSignature) reported cx=749, ccx=920, and it ranked #4 in --hotspots. Before this PR, nothing on the row said anything was wrong.”
 - Measurements table: “PrintFuncSignature | a method, cx=749 ccx=920 loc=5479 | a free function, cx=3 ccx=2 loc=15”.
 - “--hotspots excludes flagged functions instead of ranking a number the tool itself calls an artifact”; the re-parse “Blank[s] ALL-CAPS function-like macro invocations that sit alone on a line as class/struct/union members” and “Adopt[s] the new tree only if it holds strictly fewer error bytes”; “Only the ALL-CAPS, class-body shape is repaired. Lowercase and namespace-scope macro runs still derail, and the detector keeps flagging them.”
-- Gates: “test/extentcheck.sh (55 checks …)” and “test/macroreparsecheck.sh (103 checks)”, “both red on their pre-change binaries”.
-22% DECLINED IN SILENCE — pending merge: #136 (PR body):
+- Gates: “test/extentcheck.sh (55 checks …)” and “test/macroreparsecheck.sh (103 checks)”, “both red on their pre-change binaries”. Those two counts are the PR body's, taken at merge; on main 40a1895b both gates print ALL PASS but neither prints a total, and extentcheck's unit arm now reads “20 rule cases” where the PR body said 19 — so read 55/103 as the merged PR's count, not a re-derive.
+22% DECLINED IN SILENCE — merged: #136, merge commit d752d953 (PR body):
 - The rule: “a bare-name call with two or more candidates, none in the caller's file or directory, and no narrowing rescue is declined”; “the decline was silent … --callers=X answered count=0 exactly as if nothing called X”.
 - “memgraph: 22% of all call references were being discarded this way.” Table: “memgraph (merged tree) | 295,086 | 65,516 | 22.2%”.
 - “Header: declined=N”; “declined_calls=K on the --callers, --callees and --impact roots”.
 - “every iteration of the resolve loop now ends in exactly one named disposition”; “--pin-census prints the balance”.
 - “#134's std:: guard exits the loop with continue, and on the merged tree its refused calls came out uncounted: 1,495 on ripwire and 4,966 on memgraph … They are now counted as external”; both census lines end “unaccounted=0”.
-- “test/declinecheck.sh has a fixture covering 17 languages”; “Now it passes 104 checks.”
-A NEW LANGUAGE MUST NOT CHANGE OLD ANSWERS — pending merge: #126 (Kotlin; PR author xCatG):
-- Commit 201ca038: “the PR #126 review found the decline on retrofit, where Response.body's callers fell from 279 to 5 once same-named Kotlin body() methods were indexed. That number belongs to #126's Kotlin binary.”
-- The draft 0.6.0 CHANGELOG, from the coordinator's brief on the maintainer fixes: “retrofit, a mixed Java and Kotlin tree: Response.java:body keeps its 279 callers”; “a call reaches the other JVM language only when its own language has no candidate”; “Gate: test/kotlincheck.sh, written red first: 28 of its 48 arms fail on main.”
-- The coordinator's brief for this deck: “fixed back to 279, with the invariant that adding .kt never changes a Java-only edge”.
+- “test/declinecheck.sh has a fixture covering 17 languages”; “Now it passes 104 checks.” Also the PR body's count at merge; the gate prints “declinecheck: PASS” on main 40a1895b without a total.
+- Re-checked on the merged tree: CHANGELOG.md on main 40a1895b, “On main after the std::-qualified call guard … the same --no-cache map declines 65,516 of memgraph's 295,086 call references (22.2%)”, and “both end unaccounted=0”.
+A NEW LANGUAGE MUST NOT CHANGE OLD ANSWERS — merged: #126, merge commit 1ad9184a (Kotlin; PR author xCatG):
+- The 279 figures are re-verified on the merged tree. Commit 359adca7 (on main via 1ad9184a), “fix(kotlin): the JVM bridge reaches the other language only when the caller's own has no candidate”: “On square/retrofit (306 .java, 16 .kt), Response.java:body is 279 callers on main 766913d0 and 5 on the PR head merged with main (09d8a6a3): 253 Java (caller, callee) pairs deleted by the test-only Kotlin body() functions (five spelled in two test directories, three with bodies), every gauge unmoved.”
+- Same commit, the fix: “graph.h keepOwnJvmLanguageCandidates … a Java or Kotlin reference admits the other JVM language's candidates only when its own language offers none”; “Every name the caller's language defines resolves exactly as it did before the bridge existed”.
+- The gate line, from the same commit's §14: “(c) the invariant: a Java-only tree against the same tree plus Kotlin definitions spelling the same names. --callers of six Java definitions, the Java interface's implementors and all 23 Java map rows (edges, prov=, amb=) must be identical, plus a mutation deleting the Kotlin interface so Tagged must bridge.”
+- On main 40a1895b: test/kotlincheck.sh, “on square/retrofit the test-only Kotlin body() functions … took Response.java's body from 279 callers to 5”; docs/ARCHITECTURE.md, “square/retrofit: Response.body keeps its 279 callers”.
 - PR #126 body: “a JVM interop bridge that resolves Kotlin↔Java calls bidirectionally”.
-- CAVEAT: PR #126's head (1e21943a) body does not carry the 279 figures or the 28-of-48 count; re-verify them on the merged tree.</a:t>
+- The earlier draft's “28 of its 48 arms fail on main” was DROPPED, not restated: nothing on main or in #126's body carries it, and kotlincheck's own header says the pre-Kotlin red is trivial — “every .kt file in this fixture leaves the index as why="unsupported-ext" … That trivial red is not what this gate is for.” The card now names §14's invariant instead.</a:t>
             </a:r>
             <a:endParaRPr lang="en-US" dirty="0"/>
           </a:p>
@@ -1586,7 +1588,9 @@
           <a:p>
             <a:r>
               <a:rPr lang="en-US" dirty="0"/>
-              <a:t/>
+              <a:t>SOURCES (head-to-head, round 4)
+- The timing caveat in the footer is the README's own, added by #141 (merge commit d8e788b1, 2026-09-11) beside both round-4 tables. README.md on main 40a1895b: “Measured 2026-08-08, before the performance work that ships in 0.6.0. ripwire has become faster since — llvm-project's cold parse (182,555 files) fell from 194.1 s to 155.6 s of CPU, and --pack-task on a Go repository from 8.13 s to 5.88 s — but these timing columns have not been re-measured.”
+- It changes no number in the table: the strict file@10 bars and the 1.46x margin are accuracy, not timing, and were never re-measured either. The index-cost card (0.31 s / 1.24 s / 3.37 s / 7.82 s / 34.0 s) is a timing column, so the caveat covers it too.</a:t>
             </a:r>
             <a:endParaRPr lang="en-US" dirty="0"/>
           </a:p>
@@ -2466,7 +2470,10 @@
           <a:p>
             <a:r>
               <a:rPr lang="en-US" dirty="0"/>
-              <a:t/>
+              <a:t>SOURCES (the tripwire)
+- The src/ census is re-derived, not remembered: `ripwire ./src` on main 40a1895b prints files=166 symbols=5778 edges=17150 ambiguous=7441 unresolved=1658 declined=4803 (warm and --no-cache identical). It read files=153 symbols=5122 edges=14182 ambiguous=5982 unresolved=1598 when the slide was written on 2026-09-06.
+- declined= is new in 0.6.0 — #136, merge commit d752d953: a call the resolver refused to guess at is now counted instead of vanishing. It belongs on this slide because it is the same contract the other three rules state.
+- The --callers example: `ripwire . --callers=rankGraphTeleport` on main 40a1895b still answers defs="1" count="6" counts_floor="1", with runEval and rankGraph as its first two rows.</a:t>
             </a:r>
             <a:endParaRPr lang="en-US" dirty="0"/>
           </a:p>
@@ -3193,7 +3200,7 @@
             <a:r>
               <a:rPr lang="en-US" dirty="0"/>
               <a:t>SOURCES (grammar count and language row)
-- "24 vendored grammars" and Kotlin in the language row — pending merge: #126 (PR body: "Adds Kotlin (.kt) language support: vendored fwcd/tree-sitter-kotlin grammar"). Without #126: 23 (commit 680a0a3d) and no Kotlin.</a:t>
+- "24 vendored grammars" and Kotlin in the language row — merged: #126 (merge commit 1ad9184a, 2026-09-11); PR body, "Adds Kotlin (.kt) language support: vendored fwcd/tree-sitter-kotlin grammar". Before #126: 23 (commit 680a0a3d) and no Kotlin. README.md on main 40a1895b says "24 vendored grammars".</a:t>
             </a:r>
             <a:endParaRPr lang="en-US" dirty="0"/>
           </a:p>
@@ -3281,7 +3288,10 @@
           <a:p>
             <a:r>
               <a:rPr lang="en-US" dirty="0"/>
-              <a:t/>
+              <a:t>SOURCES (agent wiring)
+- “31 MCP verbs … 16 read verbs … 12 flagship reflexes … 3 span-addressed edit verbs” — README.md on main 40a1895b: “One stdio server, 31 verbs — 16 read, 12 flagship-reflex, 3 span-addressed edit”.
+- “18 agent skills” — README.md: “skills/ ships eighteen task-shaped skills”; skills/ holds 18 directories.
+- “12 orchestrator loops” — README.md: “prompts/ holds twelve self-contained orchestrator prompts”, and prompts/ holds 12 .md files besides its own README.md. This card said 11 until 2026-09-11; test/readmedriftcheck.sh arm (I1) gates the README against the directory, and the deck now states the same number.</a:t>
             </a:r>
             <a:endParaRPr lang="en-US" dirty="0"/>
           </a:p>
@@ -3458,7 +3468,7 @@
             <a:r>
               <a:rPr lang="en-US" dirty="0"/>
               <a:t>SOURCES (grammar count only)
-- "24 grammars vendored" — pending merge: #126 (PR body: "vendored fwcd/tree-sitter-kotlin grammar"). Without #126 the count is 23 (commit 680a0a3d).</a:t>
+- "24 grammars vendored" — merged: #126, merge commit 1ad9184a (PR body: "vendored fwcd/tree-sitter-kotlin grammar"). Before #126 the count was 23 (commit 680a0a3d); README.md on main 40a1895b says "24 vendored grammars".</a:t>
             </a:r>
             <a:endParaRPr lang="en-US" dirty="0"/>
           </a:p>
@@ -3898,7 +3908,9 @@
           <a:p>
             <a:r>
               <a:rPr lang="en-US" dirty="0"/>
-              <a:t/>
+              <a:t>SOURCES (the two live-repo figures on this slide — both re-derived 2026-09-11 on main 40a1895b, because they move with the tree)
+- --pattern: `git archive 40a1895b | tar -x -C DIR; ripwire DIR --pattern='VERIFY($X)' --no-cache` → hits="116" eligible_files="896" skipped_files="0" of_files="1961", grammars= naming 13 objects over 11 languages. It read 101 hits over 625 eligible files when the slide was written on 2026-09-06; the tree has grown since.
+- --lint: `ripwire DIR --lint --no-cache` over the same archive → 39 rule rows, 31 with count&gt;0, of which 16 carry shown_rows="0", totalling 588 findings. It read 14 of 31 and 368 findings on 2026-09-06.</a:t>
             </a:r>
             <a:endParaRPr lang="en-US" dirty="0"/>
           </a:p>
@@ -4162,12 +4174,12 @@
           <a:p>
             <a:r>
               <a:rPr lang="en-US" dirty="0"/>
-              <a:t>SOURCES (0.6.0 at a glance). Window: after the v0.5.0 tag (commit bacfa3b7, 2026-09-07) through main 766913d0. Merge dates read with gh: #83 2026-09-09, #92 2026-09-10, #106 (merge commit 6f91fed2) 2026-09-10, #127 and #134 2026-09-11.
+              <a:t>SOURCES (0.6.0 at a glance). Window: after the v0.5.0 tag (commit bacfa3b7, 2026-09-07) through main 40a1895b. Merge dates read with gh: #83 2026-09-09, #92 2026-09-10, #106 (merge commit 6f91fed2) 2026-09-10, #127, #134, #136 (d752d953), #137 (f22081b0), #138 (688cc321), #135 (1187b7f3), #126 (1ad9184a), #141 (d8e788b1) and #140 (40a1895b) all 2026-09-11.
 - Title words “faster where it hurt”: the draft 0.6.0 release notes' heading. “Rip'n Fast”: README.md's H1, “Rip'n Fast. Fewer Tokens. Better Code.”
 A NEW LANGUAGE
 - Dart: merge commit 6f91fed2, “merge(dart): a 23rd grammar …” — “On flutter/packages (3,706 .dart files) this indexes 71,726 Dart symbols and none of that corpus's 289 degraded parses is a .dart file.” Lane by @calvinchengx (#75).
 - Six arrays: 6f91fed2 — “moves six per-language array extents off the spelled-out last enumerator (std::size_t( Lang::Elixir ) + 1) and onto model.h's kLangCount”; with two tallies reverted, --skipped over two .cpp and two .dart files “prints indexed=4 with a single &lt;lang n=cpp …&gt; row: two indexed files gone from the census, with nothing saying a row is missing.”
-- Kotlin — pending merge: #126 (PR body; PR author xCatG): “vendored fwcd/tree-sitter-kotlin grammar … a JVM interop bridge that resolves Kotlin↔Java calls bidirectionally”; “Zero ASan/UBSan/LSan findings across 501 real .kt files (8 local Android/JVM repos) … and ~9,500 additional .kt files across 5 larger real-world corpora (nowinandroid, compose-samples, architecture-samples, ktor, Signal-Android) — deterministic and well-formed on every one”. The quadrant heading “two new languages” is pending with it.
+- Kotlin — merged: #126, merge commit 1ad9184a (2026-09-11); PR body, PR author xCatG: “vendored fwcd/tree-sitter-kotlin grammar … a JVM interop bridge that resolves Kotlin↔Java calls bidirectionally”; “Zero ASan/UBSan/LSan findings across 501 real .kt files (8 local Android/JVM repos) … and ~9,500 additional .kt files across 5 larger real-world corpora (nowinandroid, compose-samples, architecture-samples, ktor, Signal-Android) — deterministic and well-formed on every one”. The quadrant heading “two new languages” is true as of that merge.
 RIP'N FAST
 - 159.7 → 9.2 s: PR #83 body, table “--grep | 159.7 s | 9.2 s” (warm, llvm-project); cause “recomputed on every still-ambiguous receiver-typed call”, “Each receiver type's cone is now computed once”.
 - −19.9%, 194.1 → 155.6 s: PR #127 body table, llvm-project cold map --no-cache, 194.14 → 155.60 CPU s, −19.9%, n=1, output identical. PR #130 body: “22 walks converted”. “byte-identical”: #127 “Every row cmp-identical between the two binaries.”
@@ -4181,7 +4193,9 @@
 - 6 → 50 / 12, 16% → 54%: PR #127 lane H, “kHandoffSymbolsPerFile 6 → 50 code / 12 prose (containment 16 → 54%, additive)”.
 - Paging: PR #127 lane H2, “--doc-drift, --flags/--flip, --situ disclose their cuts and page; answer rows never page”; gate-pin note, “the 25-row cap on tests-to-run was RETIRED … the arm now asserts every row listed”.
 FOOTER
-- PR #127 body: “x86-64 floor is -march=x86-64-v3 (AVX2, BMI1/2, FMA — RHEL 10's own floor). Prebuilt Linux x86 binaries now require AVX2-class CPUs. NEON on arm64.”</a:t>
+- PR #127 body: “x86-64 floor is -march=x86-64-v3 (AVX2, BMI1/2, FMA — RHEL 10's own floor). Prebuilt Linux x86 binaries now require AVX2-class CPUs. NEON on arm64.”
+- The footer says “x86-64”, not “x86-64 Linux”, because of #137 (merge commit f22081b0, 2026-09-11): PR body, the macOS x86_64 cross-build “picked its flags from CMAKE_SYSTEM_PROCESSOR … Every x86_64 compile line got -mcpu=apple-m1 and no -march at all”, and now gets “-march=x86-64-v3”. So the floor is the x86-64 binaries', both OSes.
+- “the installer checks before it downloads and names what is missing” — #138 (merge commit 688cc321, 2026-09-11): PR body, “Before downloading, on x86_64 … Below v3, it stops before the download, lists the missing features, and points to a source build”; and INSTALL.md on main 40a1895b, “From 0.6.0 the prebuilt x86-64 binaries need an x86-64-v3 CPU (AVX2, BMI2, FMA and the rest of that level), roughly Intel Haswell (2013) or AMD Excavator (2015) and newer; the installer checks before it downloads.”</a:t>
             </a:r>
             <a:endParaRPr lang="en-US" dirty="0"/>
           </a:p>
@@ -9108,7 +9122,7 @@
                 <a:ea typeface="Arial" pitchFamily="34" charset="-122"/>
                 <a:cs typeface="Arial" pitchFamily="34" charset="-120"/>
               </a:rPr>
-              <a:t>A call reaches the other JVM language only when its own language has no candidate, so adding .kt files never changes a Java-only edge. The Kotlin gate was written red first.</a:t>
+              <a:t>A call reaches the other JVM language only when its own language has no candidate, so adding .kt files never changes a Java-only edge. The bridge keeps its real job: a call into a name only the other language defines.</a:t>
             </a:r>
             <a:endParaRPr lang="en-US" sz="1000" dirty="0"/>
           </a:p>
@@ -9147,7 +9161,7 @@
                 <a:ea typeface="Courier New" pitchFamily="34" charset="-122"/>
                 <a:cs typeface="Courier New" pitchFamily="34" charset="-120"/>
               </a:rPr>
-              <a:t>test/kotlincheck.sh · 28 of 48 arms red on main</a:t>
+              <a:t>test/kotlincheck.sh §14 · the Java-only invariant</a:t>
             </a:r>
             <a:endParaRPr lang="en-US" sz="850" dirty="0"/>
           </a:p>
@@ -9645,7 +9659,7 @@
                 <a:ea typeface="Courier New" pitchFamily="34" charset="-122"/>
                 <a:cs typeface="Courier New" pitchFamily="34" charset="-120"/>
               </a:rPr>
-              <a:t>bench/headtohead/r4-2026-08-06/ — harness, per-instance JSONL and recipe committed · replaces the two non-comparable tables r1 and r2 needed</a:t>
+              <a:t>bench/headtohead/r4-2026-08-06/ — harness, JSONL and recipe committed; replaces the two non-comparable tables r1 and r2 needed · measured 2026-08-08, BEFORE 0.6.0's speedups: timings not re-measured</a:t>
             </a:r>
             <a:endParaRPr lang="en-US" sz="1050" dirty="0"/>
           </a:p>
@@ -17931,7 +17945,7 @@
                 <a:ea typeface="Arial" pitchFamily="34" charset="-122"/>
                 <a:cs typeface="Arial" pitchFamily="34" charset="-120"/>
               </a:rPr>
-              <a:t>Speed caveat travels with the number: ripwire answers from a warm, pre-built index, and round 4 measured its index cost too — 0.31 s, tabulated beside the competitors' rather than omitted.</a:t>
+              <a:t>Speed caveat travels with the number: ripwire answers from a warm, pre-built index, and round 4 measured its index cost too — 0.31 s, tabulated beside the competitors' rather than omitted. Measured 2026-08-08, before 0.6.0's performance work; not re-measured since.</a:t>
             </a:r>
             <a:endParaRPr lang="en-US" sz="1150" dirty="0"/>
           </a:p>
@@ -21958,7 +21972,7 @@
                 <a:ea typeface="Courier New" pitchFamily="34" charset="-122"/>
                 <a:cs typeface="Courier New" pitchFamily="34" charset="-120"/>
               </a:rPr>
-              <a:t>This repository's own src/: files=153 symbols=5122 edges=14182 ambiguous=5982 unresolved=1598.</a:t>
+              <a:t>This repository's own src/: files=166 symbols=5778 edges=17150 ambiguous=7441 unresolved=1658 declined=4803.</a:t>
             </a:r>
             <a:endParaRPr lang="en-US" sz="1000" dirty="0"/>
           </a:p>
@@ -23202,7 +23216,7 @@
                 <a:ea typeface="Arial" pitchFamily="34" charset="-122"/>
                 <a:cs typeface="Arial" pitchFamily="34" charset="-120"/>
               </a:rPr>
-              <a:t>598 gate scripts</a:t>
+              <a:t>602 gate scripts</a:t>
             </a:r>
             <a:endParaRPr lang="en-US" sz="1450" dirty="0"/>
           </a:p>
@@ -23942,7 +23956,7 @@
                 <a:ea typeface="Arial" pitchFamily="34" charset="-122"/>
                 <a:cs typeface="Arial" pitchFamily="34" charset="-120"/>
               </a:rPr>
-              <a:t>598</a:t>
+              <a:t>602</a:t>
             </a:r>
             <a:endParaRPr lang="en-US" sz="4200" dirty="0"/>
           </a:p>
@@ -31457,7 +31471,7 @@
                 <a:ea typeface="Courier New" pitchFamily="34" charset="-122"/>
                 <a:cs typeface="Courier New" pitchFamily="34" charset="-120"/>
               </a:rPr>
-              <a:t>11 orchestrator loops</a:t>
+              <a:t>12 orchestrator loops</a:t>
             </a:r>
             <a:endParaRPr lang="en-US" sz="1400" dirty="0"/>
           </a:p>
@@ -34378,7 +34392,7 @@
                 <a:ea typeface="Arial" pitchFamily="34" charset="-122"/>
                 <a:cs typeface="Arial" pitchFamily="34" charset="-120"/>
               </a:rPr>
-              <a:t>598 gate scripts</a:t>
+              <a:t>602 gate scripts</a:t>
             </a:r>
             <a:endParaRPr lang="en-US" sz="1200" dirty="0"/>
           </a:p>
@@ -38589,7 +38603,7 @@
                 <a:ea typeface="Arial" pitchFamily="34" charset="-122"/>
                 <a:cs typeface="Arial" pitchFamily="34" charset="-120"/>
               </a:rPr>
-              <a:t>foo($X, ...) across 13 grammar objects / 11 languages. On this repo VERIFY($X) finds 101 hits over 625 eligible files, each with its enclosing symbol. A pattern no served grammar resolves REFUSES (exit 1) instead of reporting hits=0.</a:t>
+              <a:t>foo($X, ...) across 13 grammar objects / 11 languages. On this repo VERIFY($X) finds 116 hits over 896 eligible files, each with its enclosing symbol. A pattern no served grammar resolves REFUSES (exit 1) instead of reporting hits=0.</a:t>
             </a:r>
             <a:endParaRPr lang="en-US" sz="1050" dirty="0"/>
           </a:p>
@@ -39309,7 +39323,7 @@
                 <a:ea typeface="Arial" pitchFamily="34" charset="-122"/>
                 <a:cs typeface="Arial" pitchFamily="34" charset="-120"/>
               </a:rPr>
-              <a:t>on this repository 14 of the 31 rules that fired contribute ZERO shown rows — 368 findings whose only evidence is their count=. A rule no corpus language registers carries applicable=0, so its zero is inertness, not a measurement.</a:t>
+              <a:t>on this repository 16 of the 31 rules that fired contribute ZERO shown rows — 588 findings whose only evidence is their count=. A rule no corpus language registers carries applicable=0, so its zero is inertness, not a measurement.</a:t>
             </a:r>
             <a:endParaRPr lang="en-US" sz="1050" dirty="0"/>
           </a:p>
@@ -42197,7 +42211,7 @@
                 <a:ea typeface="Courier New" pitchFamily="34" charset="-122"/>
                 <a:cs typeface="Courier New" pitchFamily="34" charset="-120"/>
               </a:rPr>
-              <a:t>upgrade note: prebuilt x86-64 Linux binaries now need an x86-64-v3 (AVX2-class) CPU, RHEL 10's own floor; arm64 uses NEON (#127)</a:t>
+              <a:t>upgrade note: prebuilt x86-64 binaries now need an x86-64-v3 (AVX2-class) CPU, RHEL 10's own floor — the installer checks before it downloads and names what is missing; arm64 uses NEON (#127, #137, #138)</a:t>
             </a:r>
             <a:endParaRPr lang="en-US" sz="1050" dirty="0"/>
           </a:p>

--- a/present/ripwire-showcase.pptx
+++ b/present/ripwire-showcase.pptx
@@ -4764,7 +4764,7 @@
       </p:sp>
       <p:pic>
         <p:nvPicPr>
-          <p:cNvPr id="8" name="Image 0" descr="/Users/qgames/AppDevelopLocal/project2/ripwire/.claude/worktrees/agent-a667d452e2d8f5276/present/assets/paddle-out.png">    </p:cNvPr>
+          <p:cNvPr id="8" name="Image 0" descr="paddle-out wave">    </p:cNvPr>
           <p:cNvPicPr>
             <a:picLocks noChangeAspect="1"/>
           </p:cNvPicPr>
